--- a/deck-pptx/EOV-Credentials-2026.pptx
+++ b/deck-pptx/EOV-Credentials-2026.pptx
@@ -3502,7 +3502,7 @@
                 <a:ea typeface="Arial" pitchFamily="34" charset="-122"/>
                 <a:cs typeface="Arial" pitchFamily="34" charset="-120"/>
               </a:rPr>
-              <a:t>[NAME] · [TITLE] · [EMAIL] · [PHONE]</a:t>
+              <a:t>tanvi@eov.ae  ·  eov.ae  ·  Abu Dhabi and Dubai</a:t>
             </a:r>
             <a:endParaRPr lang="en-US" sz="950" dirty="0"/>
           </a:p>
@@ -3629,8 +3629,8 @@
         </p:nvSpPr>
         <p:spPr>
           <a:xfrm>
-            <a:off x="685800" y="1714500"/>
-            <a:ext cx="9525305" cy="533095"/>
+            <a:off x="685800" y="1676095"/>
+            <a:ext cx="9525305" cy="761695"/>
           </a:xfrm>
           <a:prstGeom prst="rect">
             <a:avLst/>
@@ -3657,7 +3657,7 @@
                 <a:ea typeface="Arial" pitchFamily="34" charset="-122"/>
                 <a:cs typeface="Arial" pitchFamily="34" charset="-120"/>
               </a:rPr>
-              <a:t>The lunar calendar moves roughly eleven days a year, so nothing carries over. Each occasion runs as a full programme of product, photography, campaign, events and retail.</a:t>
+              <a:t>The lunar calendar moves roughly eleven days a year, so nothing carries over and nothing can be rescheduled. Each occasion is rebuilt from scratch as a full programme — product, photography, campaign, events and retail — against a shelf date that does not move.</a:t>
             </a:r>
             <a:endParaRPr lang="en-US" sz="1300" dirty="0"/>
           </a:p>
@@ -4850,7 +4850,7 @@
         </p:nvSpPr>
         <p:spPr>
           <a:xfrm>
-            <a:off x="6228893" y="3238805"/>
+            <a:off x="6228893" y="2171700"/>
             <a:ext cx="5676870" cy="381305"/>
           </a:xfrm>
           <a:prstGeom prst="rect">
@@ -4883,42 +4883,23 @@
       </p:sp>
       <p:sp>
         <p:nvSpPr>
-          <p:cNvPr id="4" name="Text 2"/>
-          <p:cNvSpPr txBox="1"/>
-          <p:nvPr/>
-        </p:nvSpPr>
-        <p:spPr>
-          <a:xfrm>
-            <a:off x="685800" y="504749"/>
-            <a:ext cx="10820095" cy="190195"/>
-          </a:xfrm>
-          <a:prstGeom prst="rect">
-            <a:avLst/>
-          </a:prstGeom>
-          <a:noFill/>
-          <a:ln/>
-        </p:spPr>
-        <p:txBody>
-          <a:bodyPr wrap="square" lIns="0" tIns="0" rIns="0" bIns="0" rtlCol="0" anchor="ctr"/>
-          <a:lstStyle/>
-          <a:p>
-            <a:pPr indent="0" marL="0">
-              <a:buNone/>
-            </a:pPr>
-            <a:r>
-              <a:rPr lang="en-US" sz="950" b="1" spc="300" kern="0" dirty="0">
-                <a:solidFill>
-                  <a:srgbClr val="8A8F98"/>
-                </a:solidFill>
-                <a:latin typeface="Arial" pitchFamily="34" charset="0"/>
-                <a:ea typeface="Arial" pitchFamily="34" charset="-122"/>
-                <a:cs typeface="Arial" pitchFamily="34" charset="-120"/>
-              </a:rPr>
-              <a:t>KGS · METAFAB® · INDUSTRIAL B2B</a:t>
-            </a:r>
-            <a:endParaRPr lang="en-US" sz="950" dirty="0"/>
-          </a:p>
-        </p:txBody>
+          <p:cNvPr id="4" name="Shape 2"/>
+          <p:cNvSpPr/>
+          <p:nvPr/>
+        </p:nvSpPr>
+        <p:spPr>
+          <a:xfrm>
+            <a:off x="5943600" y="4742993"/>
+            <a:ext cx="6248370" cy="2115007"/>
+          </a:xfrm>
+          <a:prstGeom prst="rect">
+            <a:avLst/>
+          </a:prstGeom>
+          <a:solidFill>
+            <a:srgbClr val="000000"/>
+          </a:solidFill>
+          <a:ln/>
+        </p:spPr>
       </p:sp>
       <p:sp>
         <p:nvSpPr>
@@ -4928,8 +4909,8 @@
         </p:nvSpPr>
         <p:spPr>
           <a:xfrm>
-            <a:off x="685800" y="800100"/>
-            <a:ext cx="4762195" cy="1809598"/>
+            <a:off x="6324905" y="5067605"/>
+            <a:ext cx="5486674" cy="724205"/>
           </a:xfrm>
           <a:prstGeom prst="rect">
             <a:avLst/>
@@ -4942,23 +4923,20 @@
           <a:lstStyle/>
           <a:p>
             <a:pPr indent="0" marL="0">
-              <a:lnSpc>
-                <a:spcPts val="3080"/>
-              </a:lnSpc>
-              <a:buNone/>
-            </a:pPr>
-            <a:r>
-              <a:rPr lang="en-US" sz="2550" b="1" dirty="0">
-                <a:solidFill>
-                  <a:srgbClr val="111111"/>
-                </a:solidFill>
-                <a:latin typeface="Arial" pitchFamily="34" charset="0"/>
-                <a:ea typeface="Arial" pitchFamily="34" charset="-122"/>
-                <a:cs typeface="Arial" pitchFamily="34" charset="-120"/>
-              </a:rPr>
-              <a:t>Marketing a material that shields naval vessels.</a:t>
-            </a:r>
-            <a:endParaRPr lang="en-US" sz="2550" dirty="0"/>
+              <a:buNone/>
+            </a:pPr>
+            <a:r>
+              <a:rPr lang="en-US" sz="3750" b="1" dirty="0">
+                <a:solidFill>
+                  <a:srgbClr val="FFFFFF"/>
+                </a:solidFill>
+                <a:latin typeface="Arial" pitchFamily="34" charset="0"/>
+                <a:ea typeface="Arial" pitchFamily="34" charset="-122"/>
+                <a:cs typeface="Arial" pitchFamily="34" charset="-120"/>
+              </a:rPr>
+              <a:t>5.6×</a:t>
+            </a:r>
+            <a:endParaRPr lang="en-US" sz="3750" dirty="0"/>
           </a:p>
         </p:txBody>
       </p:sp>
@@ -4970,89 +4948,8 @@
         </p:nvSpPr>
         <p:spPr>
           <a:xfrm>
-            <a:off x="685800" y="2381098"/>
-            <a:ext cx="4762195" cy="1047902"/>
-          </a:xfrm>
-          <a:prstGeom prst="rect">
-            <a:avLst/>
-          </a:prstGeom>
-          <a:noFill/>
-          <a:ln/>
-        </p:spPr>
-        <p:txBody>
-          <a:bodyPr wrap="square" lIns="0" tIns="0" rIns="0" bIns="0" rtlCol="0" anchor="t"/>
-          <a:lstStyle/>
-          <a:p>
-            <a:pPr indent="0" marL="0">
-              <a:lnSpc>
-                <a:spcPts val="1950"/>
-              </a:lnSpc>
-              <a:buNone/>
-            </a:pPr>
-            <a:r>
-              <a:rPr lang="en-US" sz="1300" dirty="0">
-                <a:solidFill>
-                  <a:srgbClr val="5A6068"/>
-                </a:solidFill>
-                <a:latin typeface="Arial" pitchFamily="34" charset="0"/>
-                <a:ea typeface="Arial" pitchFamily="34" charset="-122"/>
-                <a:cs typeface="Arial" pitchFamily="34" charset="-120"/>
-              </a:rPr>
-              <a:t>Metallised fabric attenuating EMF, EMI and RF at material level. Sold to engineers working to specification, on cycles measured in quarters. Most agencies decline this brief.</a:t>
-            </a:r>
-            <a:endParaRPr lang="en-US" sz="1300" dirty="0"/>
-          </a:p>
-        </p:txBody>
-      </p:sp>
-      <p:sp>
-        <p:nvSpPr>
-          <p:cNvPr id="7" name="Text 5"/>
-          <p:cNvSpPr txBox="1"/>
-          <p:nvPr/>
-        </p:nvSpPr>
-        <p:spPr>
-          <a:xfrm>
-            <a:off x="685800" y="4000500"/>
-            <a:ext cx="1447495" cy="437998"/>
-          </a:xfrm>
-          <a:prstGeom prst="rect">
-            <a:avLst/>
-          </a:prstGeom>
-          <a:noFill/>
-          <a:ln/>
-        </p:spPr>
-        <p:txBody>
-          <a:bodyPr wrap="square" lIns="0" tIns="0" rIns="0" bIns="0" rtlCol="0" anchor="ctr"/>
-          <a:lstStyle/>
-          <a:p>
-            <a:pPr indent="0" marL="0">
-              <a:buNone/>
-            </a:pPr>
-            <a:r>
-              <a:rPr lang="en-US" sz="2850" b="1" dirty="0">
-                <a:solidFill>
-                  <a:srgbClr val="111111"/>
-                </a:solidFill>
-                <a:latin typeface="Arial" pitchFamily="34" charset="0"/>
-                <a:ea typeface="Arial" pitchFamily="34" charset="-122"/>
-                <a:cs typeface="Arial" pitchFamily="34" charset="-120"/>
-              </a:rPr>
-              <a:t>5.6×</a:t>
-            </a:r>
-            <a:endParaRPr lang="en-US" sz="2850" dirty="0"/>
-          </a:p>
-        </p:txBody>
-      </p:sp>
-      <p:sp>
-        <p:nvSpPr>
-          <p:cNvPr id="8" name="Text 6"/>
-          <p:cNvSpPr txBox="1"/>
-          <p:nvPr/>
-        </p:nvSpPr>
-        <p:spPr>
-          <a:xfrm>
-            <a:off x="685800" y="4476902"/>
-            <a:ext cx="1410005" cy="381305"/>
+            <a:off x="6324905" y="5848502"/>
+            <a:ext cx="5486674" cy="437998"/>
           </a:xfrm>
           <a:prstGeom prst="rect">
             <a:avLst/>
@@ -5071,7 +4968,46 @@
               <a:buNone/>
             </a:pPr>
             <a:r>
-              <a:rPr lang="en-US" sz="950" b="1" spc="220" kern="0" dirty="0">
+              <a:rPr lang="en-US" sz="850" b="1" spc="240" kern="0" dirty="0">
+                <a:solidFill>
+                  <a:srgbClr val="54D2FE"/>
+                </a:solidFill>
+                <a:latin typeface="Arial" pitchFamily="34" charset="0"/>
+                <a:ea typeface="Arial" pitchFamily="34" charset="-122"/>
+                <a:cs typeface="Arial" pitchFamily="34" charset="-120"/>
+              </a:rPr>
+              <a:t>VISIBILITY · 96 RANKED TERMS · 40–90 DB</a:t>
+            </a:r>
+            <a:endParaRPr lang="en-US" sz="850" dirty="0"/>
+          </a:p>
+        </p:txBody>
+      </p:sp>
+      <p:sp>
+        <p:nvSpPr>
+          <p:cNvPr id="7" name="Text 5"/>
+          <p:cNvSpPr txBox="1"/>
+          <p:nvPr/>
+        </p:nvSpPr>
+        <p:spPr>
+          <a:xfrm>
+            <a:off x="685800" y="504749"/>
+            <a:ext cx="10820095" cy="190195"/>
+          </a:xfrm>
+          <a:prstGeom prst="rect">
+            <a:avLst/>
+          </a:prstGeom>
+          <a:noFill/>
+          <a:ln/>
+        </p:spPr>
+        <p:txBody>
+          <a:bodyPr wrap="square" lIns="0" tIns="0" rIns="0" bIns="0" rtlCol="0" anchor="ctr"/>
+          <a:lstStyle/>
+          <a:p>
+            <a:pPr indent="0" marL="0">
+              <a:buNone/>
+            </a:pPr>
+            <a:r>
+              <a:rPr lang="en-US" sz="950" b="1" spc="300" kern="0" dirty="0">
                 <a:solidFill>
                   <a:srgbClr val="8A8F98"/>
                 </a:solidFill>
@@ -5079,7 +5015,7 @@
                 <a:ea typeface="Arial" pitchFamily="34" charset="-122"/>
                 <a:cs typeface="Arial" pitchFamily="34" charset="-120"/>
               </a:rPr>
-              <a:t>VISIBILITY</a:t>
+              <a:t>KGS · METAFAB® · INDUSTRIAL B2B</a:t>
             </a:r>
             <a:endParaRPr lang="en-US" sz="950" dirty="0"/>
           </a:p>
@@ -5087,14 +5023,56 @@
       </p:sp>
       <p:sp>
         <p:nvSpPr>
+          <p:cNvPr id="8" name="Text 6"/>
+          <p:cNvSpPr txBox="1"/>
+          <p:nvPr/>
+        </p:nvSpPr>
+        <p:spPr>
+          <a:xfrm>
+            <a:off x="685800" y="800100"/>
+            <a:ext cx="4724705" cy="1181405"/>
+          </a:xfrm>
+          <a:prstGeom prst="rect">
+            <a:avLst/>
+          </a:prstGeom>
+          <a:noFill/>
+          <a:ln/>
+        </p:spPr>
+        <p:txBody>
+          <a:bodyPr wrap="square" lIns="0" tIns="0" rIns="0" bIns="0" rtlCol="0" anchor="t"/>
+          <a:lstStyle/>
+          <a:p>
+            <a:pPr indent="0" marL="0">
+              <a:lnSpc>
+                <a:spcPts val="2700"/>
+              </a:lnSpc>
+              <a:buNone/>
+            </a:pPr>
+            <a:r>
+              <a:rPr lang="en-US" sz="2250" b="1" dirty="0">
+                <a:solidFill>
+                  <a:srgbClr val="111111"/>
+                </a:solidFill>
+                <a:latin typeface="Arial" pitchFamily="34" charset="0"/>
+                <a:ea typeface="Arial" pitchFamily="34" charset="-122"/>
+                <a:cs typeface="Arial" pitchFamily="34" charset="-120"/>
+              </a:rPr>
+              <a:t>Marketing a material that shields naval vessels.</a:t>
+            </a:r>
+            <a:endParaRPr lang="en-US" sz="2250" dirty="0"/>
+          </a:p>
+        </p:txBody>
+      </p:sp>
+      <p:sp>
+        <p:nvSpPr>
           <p:cNvPr id="9" name="Text 7"/>
           <p:cNvSpPr txBox="1"/>
           <p:nvPr/>
         </p:nvSpPr>
         <p:spPr>
           <a:xfrm>
-            <a:off x="2286000" y="4000500"/>
-            <a:ext cx="1447495" cy="437998"/>
+            <a:off x="685800" y="2171700"/>
+            <a:ext cx="4724705" cy="170993"/>
           </a:xfrm>
           <a:prstGeom prst="rect">
             <a:avLst/>
@@ -5110,17 +5088,17 @@
               <a:buNone/>
             </a:pPr>
             <a:r>
-              <a:rPr lang="en-US" sz="2850" b="1" dirty="0">
-                <a:solidFill>
-                  <a:srgbClr val="111111"/>
-                </a:solidFill>
-                <a:latin typeface="Arial" pitchFamily="34" charset="0"/>
-                <a:ea typeface="Arial" pitchFamily="34" charset="-122"/>
-                <a:cs typeface="Arial" pitchFamily="34" charset="-120"/>
-              </a:rPr>
-              <a:t>96</a:t>
-            </a:r>
-            <a:endParaRPr lang="en-US" sz="2850" dirty="0"/>
+              <a:rPr lang="en-US" sz="830" b="1" spc="260" kern="0" dirty="0">
+                <a:solidFill>
+                  <a:srgbClr val="8A8F98"/>
+                </a:solidFill>
+                <a:latin typeface="Arial" pitchFamily="34" charset="0"/>
+                <a:ea typeface="Arial" pitchFamily="34" charset="-122"/>
+                <a:cs typeface="Arial" pitchFamily="34" charset="-120"/>
+              </a:rPr>
+              <a:t>THE SITUATION</a:t>
+            </a:r>
+            <a:endParaRPr lang="en-US" sz="830" dirty="0"/>
           </a:p>
         </p:txBody>
       </p:sp>
@@ -5132,8 +5110,212 @@
         </p:nvSpPr>
         <p:spPr>
           <a:xfrm>
-            <a:off x="2286000" y="4476902"/>
-            <a:ext cx="1410005" cy="381305"/>
+            <a:off x="685800" y="2400300"/>
+            <a:ext cx="4724705" cy="742493"/>
+          </a:xfrm>
+          <a:prstGeom prst="rect">
+            <a:avLst/>
+          </a:prstGeom>
+          <a:noFill/>
+          <a:ln/>
+        </p:spPr>
+        <p:txBody>
+          <a:bodyPr wrap="square" lIns="0" tIns="0" rIns="0" bIns="0" rtlCol="0" anchor="t"/>
+          <a:lstStyle/>
+          <a:p>
+            <a:pPr indent="0" marL="0">
+              <a:lnSpc>
+                <a:spcPts val="1580"/>
+              </a:lnSpc>
+              <a:buNone/>
+            </a:pPr>
+            <a:r>
+              <a:rPr lang="en-US" sz="1150" dirty="0">
+                <a:solidFill>
+                  <a:srgbClr val="5A6068"/>
+                </a:solidFill>
+                <a:latin typeface="Arial" pitchFamily="34" charset="0"/>
+                <a:ea typeface="Arial" pitchFamily="34" charset="-122"/>
+                <a:cs typeface="Arial" pitchFamily="34" charset="-120"/>
+              </a:rPr>
+              <a:t>Metallised fabric attenuating EMF, EMI and RF at material level, sold to engineers buying against a specification. Most agencies decline this brief.</a:t>
+            </a:r>
+            <a:endParaRPr lang="en-US" sz="1150" dirty="0"/>
+          </a:p>
+        </p:txBody>
+      </p:sp>
+      <p:sp>
+        <p:nvSpPr>
+          <p:cNvPr id="11" name="Text 9"/>
+          <p:cNvSpPr txBox="1"/>
+          <p:nvPr/>
+        </p:nvSpPr>
+        <p:spPr>
+          <a:xfrm>
+            <a:off x="685800" y="3295498"/>
+            <a:ext cx="4724705" cy="170993"/>
+          </a:xfrm>
+          <a:prstGeom prst="rect">
+            <a:avLst/>
+          </a:prstGeom>
+          <a:noFill/>
+          <a:ln/>
+        </p:spPr>
+        <p:txBody>
+          <a:bodyPr wrap="square" lIns="0" tIns="0" rIns="0" bIns="0" rtlCol="0" anchor="ctr"/>
+          <a:lstStyle/>
+          <a:p>
+            <a:pPr indent="0" marL="0">
+              <a:buNone/>
+            </a:pPr>
+            <a:r>
+              <a:rPr lang="en-US" sz="830" b="1" spc="260" kern="0" dirty="0">
+                <a:solidFill>
+                  <a:srgbClr val="8A8F98"/>
+                </a:solidFill>
+                <a:latin typeface="Arial" pitchFamily="34" charset="0"/>
+                <a:ea typeface="Arial" pitchFamily="34" charset="-122"/>
+                <a:cs typeface="Arial" pitchFamily="34" charset="-120"/>
+              </a:rPr>
+              <a:t>WHAT EOV DID</a:t>
+            </a:r>
+            <a:endParaRPr lang="en-US" sz="830" dirty="0"/>
+          </a:p>
+        </p:txBody>
+      </p:sp>
+      <p:sp>
+        <p:nvSpPr>
+          <p:cNvPr id="12" name="Text 10"/>
+          <p:cNvSpPr txBox="1"/>
+          <p:nvPr/>
+        </p:nvSpPr>
+        <p:spPr>
+          <a:xfrm>
+            <a:off x="685800" y="3524098"/>
+            <a:ext cx="4724705" cy="1162202"/>
+          </a:xfrm>
+          <a:prstGeom prst="rect">
+            <a:avLst/>
+          </a:prstGeom>
+          <a:noFill/>
+          <a:ln/>
+        </p:spPr>
+        <p:txBody>
+          <a:bodyPr wrap="square" lIns="0" tIns="0" rIns="0" bIns="0" rtlCol="0" anchor="t"/>
+          <a:lstStyle/>
+          <a:p>
+            <a:pPr indent="0" marL="0">
+              <a:lnSpc>
+                <a:spcPts val="1580"/>
+              </a:lnSpc>
+              <a:buNone/>
+            </a:pPr>
+            <a:r>
+              <a:rPr lang="en-US" sz="1150" dirty="0">
+                <a:solidFill>
+                  <a:srgbClr val="5A6068"/>
+                </a:solidFill>
+                <a:latin typeface="Arial" pitchFamily="34" charset="0"/>
+                <a:ea typeface="Arial" pitchFamily="34" charset="-122"/>
+                <a:cs typeface="Arial" pitchFamily="34" charset="-120"/>
+              </a:rPr>
+              <a:t>EOV stopped marketing the material and started marketing where it ends up. The specification stayed intact; the language moved to naval vessels, aircraft wiring and secure rooms — so a search that begins with a problem ends on the product.</a:t>
+            </a:r>
+            <a:endParaRPr lang="en-US" sz="1150" dirty="0"/>
+          </a:p>
+        </p:txBody>
+      </p:sp>
+      <p:sp>
+        <p:nvSpPr>
+          <p:cNvPr id="13" name="Text 11"/>
+          <p:cNvSpPr txBox="1"/>
+          <p:nvPr/>
+        </p:nvSpPr>
+        <p:spPr>
+          <a:xfrm>
+            <a:off x="685800" y="4762195"/>
+            <a:ext cx="4724705" cy="170993"/>
+          </a:xfrm>
+          <a:prstGeom prst="rect">
+            <a:avLst/>
+          </a:prstGeom>
+          <a:noFill/>
+          <a:ln/>
+        </p:spPr>
+        <p:txBody>
+          <a:bodyPr wrap="square" lIns="0" tIns="0" rIns="0" bIns="0" rtlCol="0" anchor="ctr"/>
+          <a:lstStyle/>
+          <a:p>
+            <a:pPr indent="0" marL="0">
+              <a:buNone/>
+            </a:pPr>
+            <a:r>
+              <a:rPr lang="en-US" sz="830" b="1" spc="260" kern="0" dirty="0">
+                <a:solidFill>
+                  <a:srgbClr val="8A8F98"/>
+                </a:solidFill>
+                <a:latin typeface="Arial" pitchFamily="34" charset="0"/>
+                <a:ea typeface="Arial" pitchFamily="34" charset="-122"/>
+                <a:cs typeface="Arial" pitchFamily="34" charset="-120"/>
+              </a:rPr>
+              <a:t>WHAT CHANGED</a:t>
+            </a:r>
+            <a:endParaRPr lang="en-US" sz="830" dirty="0"/>
+          </a:p>
+        </p:txBody>
+      </p:sp>
+      <p:sp>
+        <p:nvSpPr>
+          <p:cNvPr id="14" name="Text 12"/>
+          <p:cNvSpPr txBox="1"/>
+          <p:nvPr/>
+        </p:nvSpPr>
+        <p:spPr>
+          <a:xfrm>
+            <a:off x="685800" y="4990795"/>
+            <a:ext cx="4724705" cy="742493"/>
+          </a:xfrm>
+          <a:prstGeom prst="rect">
+            <a:avLst/>
+          </a:prstGeom>
+          <a:noFill/>
+          <a:ln/>
+        </p:spPr>
+        <p:txBody>
+          <a:bodyPr wrap="square" lIns="0" tIns="0" rIns="0" bIns="0" rtlCol="0" anchor="t"/>
+          <a:lstStyle/>
+          <a:p>
+            <a:pPr indent="0" marL="0">
+              <a:lnSpc>
+                <a:spcPts val="1580"/>
+              </a:lnSpc>
+              <a:buNone/>
+            </a:pPr>
+            <a:r>
+              <a:rPr lang="en-US" sz="1150" dirty="0">
+                <a:solidFill>
+                  <a:srgbClr val="5A6068"/>
+                </a:solidFill>
+                <a:latin typeface="Arial" pitchFamily="34" charset="0"/>
+                <a:ea typeface="Arial" pitchFamily="34" charset="-122"/>
+                <a:cs typeface="Arial" pitchFamily="34" charset="-120"/>
+              </a:rPr>
+              <a:t>Visibility up 5.6× across 96 ranked terms, in a category with no consumer search behaviour to borrow.</a:t>
+            </a:r>
+            <a:endParaRPr lang="en-US" sz="1150" dirty="0"/>
+          </a:p>
+        </p:txBody>
+      </p:sp>
+      <p:sp>
+        <p:nvSpPr>
+          <p:cNvPr id="15" name="Text 13"/>
+          <p:cNvSpPr txBox="1"/>
+          <p:nvPr/>
+        </p:nvSpPr>
+        <p:spPr>
+          <a:xfrm>
+            <a:off x="685800" y="5771693"/>
+            <a:ext cx="4724705" cy="342900"/>
           </a:xfrm>
           <a:prstGeom prst="rect">
             <a:avLst/>
@@ -5152,7 +5334,7 @@
               <a:buNone/>
             </a:pPr>
             <a:r>
-              <a:rPr lang="en-US" sz="950" b="1" spc="220" kern="0" dirty="0">
+              <a:rPr lang="en-US" sz="830" b="1" spc="160" kern="0" dirty="0">
                 <a:solidFill>
                   <a:srgbClr val="8A8F98"/>
                 </a:solidFill>
@@ -5160,96 +5342,15 @@
                 <a:ea typeface="Arial" pitchFamily="34" charset="-122"/>
                 <a:cs typeface="Arial" pitchFamily="34" charset="-120"/>
               </a:rPr>
-              <a:t>KEYWORDS</a:t>
-            </a:r>
-            <a:endParaRPr lang="en-US" sz="950" dirty="0"/>
-          </a:p>
-        </p:txBody>
-      </p:sp>
-      <p:sp>
-        <p:nvSpPr>
-          <p:cNvPr id="11" name="Text 9"/>
-          <p:cNvSpPr txBox="1"/>
-          <p:nvPr/>
-        </p:nvSpPr>
-        <p:spPr>
-          <a:xfrm>
-            <a:off x="3886200" y="4000500"/>
-            <a:ext cx="1447495" cy="437998"/>
-          </a:xfrm>
-          <a:prstGeom prst="rect">
-            <a:avLst/>
-          </a:prstGeom>
-          <a:noFill/>
-          <a:ln/>
-        </p:spPr>
-        <p:txBody>
-          <a:bodyPr wrap="square" lIns="0" tIns="0" rIns="0" bIns="0" rtlCol="0" anchor="ctr"/>
-          <a:lstStyle/>
-          <a:p>
-            <a:pPr indent="0" marL="0">
-              <a:buNone/>
-            </a:pPr>
-            <a:r>
-              <a:rPr lang="en-US" sz="2850" b="1" dirty="0">
-                <a:solidFill>
-                  <a:srgbClr val="111111"/>
-                </a:solidFill>
-                <a:latin typeface="Arial" pitchFamily="34" charset="0"/>
-                <a:ea typeface="Arial" pitchFamily="34" charset="-122"/>
-                <a:cs typeface="Arial" pitchFamily="34" charset="-120"/>
-              </a:rPr>
-              <a:t>40–90</a:t>
-            </a:r>
-            <a:endParaRPr lang="en-US" sz="2850" dirty="0"/>
-          </a:p>
-        </p:txBody>
-      </p:sp>
-      <p:sp>
-        <p:nvSpPr>
-          <p:cNvPr id="12" name="Text 10"/>
-          <p:cNvSpPr txBox="1"/>
-          <p:nvPr/>
-        </p:nvSpPr>
-        <p:spPr>
-          <a:xfrm>
-            <a:off x="3886200" y="4476902"/>
-            <a:ext cx="1410005" cy="381305"/>
-          </a:xfrm>
-          <a:prstGeom prst="rect">
-            <a:avLst/>
-          </a:prstGeom>
-          <a:noFill/>
-          <a:ln/>
-        </p:spPr>
-        <p:txBody>
-          <a:bodyPr wrap="square" lIns="0" tIns="0" rIns="0" bIns="0" rtlCol="0" anchor="t"/>
-          <a:lstStyle/>
-          <a:p>
-            <a:pPr indent="0" marL="0">
-              <a:lnSpc>
-                <a:spcPts val="1200"/>
-              </a:lnSpc>
-              <a:buNone/>
-            </a:pPr>
-            <a:r>
-              <a:rPr lang="en-US" sz="950" b="1" spc="220" kern="0" dirty="0">
-                <a:solidFill>
-                  <a:srgbClr val="8A8F98"/>
-                </a:solidFill>
-                <a:latin typeface="Arial" pitchFamily="34" charset="0"/>
-                <a:ea typeface="Arial" pitchFamily="34" charset="-122"/>
-                <a:cs typeface="Arial" pitchFamily="34" charset="-120"/>
-              </a:rPr>
-              <a:t>DB SHIELDING</a:t>
-            </a:r>
-            <a:endParaRPr lang="en-US" sz="950" dirty="0"/>
+              <a:t>Positioning · technical content · search · trade collateral</a:t>
+            </a:r>
+            <a:endParaRPr lang="en-US" sz="830" dirty="0"/>
           </a:p>
         </p:txBody>
       </p:sp>
       <p:pic>
         <p:nvPicPr>
-          <p:cNvPr id="13" name="Image 0" descr="assets/eov-wordmark-black-sm.png">    </p:cNvPr>
+          <p:cNvPr id="16" name="Image 0" descr="assets/eov-wordmark-black-sm.png">    </p:cNvPr>
           <p:cNvPicPr>
             <a:picLocks noChangeAspect="1"/>
           </p:cNvPicPr>
@@ -5273,7 +5374,7 @@
       </p:pic>
       <p:sp>
         <p:nvSpPr>
-          <p:cNvPr id="14" name="Text 11"/>
+          <p:cNvPr id="17" name="Text 14"/>
           <p:cNvSpPr txBox="1"/>
           <p:nvPr/>
         </p:nvSpPr>
@@ -5688,7 +5789,7 @@
         </p:nvSpPr>
         <p:spPr>
           <a:xfrm>
-            <a:off x="6228893" y="3238805"/>
+            <a:off x="6228893" y="2171700"/>
             <a:ext cx="5676870" cy="381305"/>
           </a:xfrm>
           <a:prstGeom prst="rect">
@@ -5721,42 +5822,23 @@
       </p:sp>
       <p:sp>
         <p:nvSpPr>
-          <p:cNvPr id="4" name="Text 2"/>
-          <p:cNvSpPr txBox="1"/>
-          <p:nvPr/>
-        </p:nvSpPr>
-        <p:spPr>
-          <a:xfrm>
-            <a:off x="685800" y="504749"/>
-            <a:ext cx="10820095" cy="190195"/>
-          </a:xfrm>
-          <a:prstGeom prst="rect">
-            <a:avLst/>
-          </a:prstGeom>
-          <a:noFill/>
-          <a:ln/>
-        </p:spPr>
-        <p:txBody>
-          <a:bodyPr wrap="square" lIns="0" tIns="0" rIns="0" bIns="0" rtlCol="0" anchor="ctr"/>
-          <a:lstStyle/>
-          <a:p>
-            <a:pPr indent="0" marL="0">
-              <a:buNone/>
-            </a:pPr>
-            <a:r>
-              <a:rPr lang="en-US" sz="950" b="1" spc="300" kern="0" dirty="0">
-                <a:solidFill>
-                  <a:srgbClr val="8A8F98"/>
-                </a:solidFill>
-                <a:latin typeface="Arial" pitchFamily="34" charset="0"/>
-                <a:ea typeface="Arial" pitchFamily="34" charset="-122"/>
-                <a:cs typeface="Arial" pitchFamily="34" charset="-120"/>
-              </a:rPr>
-              <a:t>FERRONATO SWITZERLAND · SMART ACCESSORIES</a:t>
-            </a:r>
-            <a:endParaRPr lang="en-US" sz="950" dirty="0"/>
-          </a:p>
-        </p:txBody>
+          <p:cNvPr id="4" name="Shape 2"/>
+          <p:cNvSpPr/>
+          <p:nvPr/>
+        </p:nvSpPr>
+        <p:spPr>
+          <a:xfrm>
+            <a:off x="5943600" y="4742993"/>
+            <a:ext cx="6248370" cy="2115007"/>
+          </a:xfrm>
+          <a:prstGeom prst="rect">
+            <a:avLst/>
+          </a:prstGeom>
+          <a:solidFill>
+            <a:srgbClr val="000000"/>
+          </a:solidFill>
+          <a:ln/>
+        </p:spPr>
       </p:sp>
       <p:sp>
         <p:nvSpPr>
@@ -5766,8 +5848,8 @@
         </p:nvSpPr>
         <p:spPr>
           <a:xfrm>
-            <a:off x="685800" y="800100"/>
-            <a:ext cx="4762195" cy="1809598"/>
+            <a:off x="6324905" y="5067605"/>
+            <a:ext cx="5486674" cy="724205"/>
           </a:xfrm>
           <a:prstGeom prst="rect">
             <a:avLst/>
@@ -5780,23 +5862,20 @@
           <a:lstStyle/>
           <a:p>
             <a:pPr indent="0" marL="0">
-              <a:lnSpc>
-                <a:spcPts val="3080"/>
-              </a:lnSpc>
-              <a:buNone/>
-            </a:pPr>
-            <a:r>
-              <a:rPr lang="en-US" sz="2550" b="1" dirty="0">
-                <a:solidFill>
-                  <a:srgbClr val="111111"/>
-                </a:solidFill>
-                <a:latin typeface="Arial" pitchFamily="34" charset="0"/>
-                <a:ea typeface="Arial" pitchFamily="34" charset="-122"/>
-                <a:cs typeface="Arial" pitchFamily="34" charset="-120"/>
-              </a:rPr>
-              <a:t>Privacy as a product, not a promise.</a:t>
-            </a:r>
-            <a:endParaRPr lang="en-US" sz="2550" dirty="0"/>
+              <a:buNone/>
+            </a:pPr>
+            <a:r>
+              <a:rPr lang="en-US" sz="3750" b="1" dirty="0">
+                <a:solidFill>
+                  <a:srgbClr val="FFFFFF"/>
+                </a:solidFill>
+                <a:latin typeface="Arial" pitchFamily="34" charset="0"/>
+                <a:ea typeface="Arial" pitchFamily="34" charset="-122"/>
+                <a:cs typeface="Arial" pitchFamily="34" charset="-120"/>
+              </a:rPr>
+              <a:t>300k+</a:t>
+            </a:r>
+            <a:endParaRPr lang="en-US" sz="3750" dirty="0"/>
           </a:p>
         </p:txBody>
       </p:sp>
@@ -5808,89 +5887,8 @@
         </p:nvSpPr>
         <p:spPr>
           <a:xfrm>
-            <a:off x="685800" y="2381098"/>
-            <a:ext cx="4762195" cy="1047902"/>
-          </a:xfrm>
-          <a:prstGeom prst="rect">
-            <a:avLst/>
-          </a:prstGeom>
-          <a:noFill/>
-          <a:ln/>
-        </p:spPr>
-        <p:txBody>
-          <a:bodyPr wrap="square" lIns="0" tIns="0" rIns="0" bIns="0" rtlCol="0" anchor="t"/>
-          <a:lstStyle/>
-          <a:p>
-            <a:pPr indent="0" marL="0">
-              <a:lnSpc>
-                <a:spcPts val="1950"/>
-              </a:lnSpc>
-              <a:buNone/>
-            </a:pPr>
-            <a:r>
-              <a:rPr lang="en-US" sz="1300" dirty="0">
-                <a:solidFill>
-                  <a:srgbClr val="5A6068"/>
-                </a:solidFill>
-                <a:latin typeface="Arial" pitchFamily="34" charset="0"/>
-                <a:ea typeface="Arial" pitchFamily="34" charset="-122"/>
-                <a:cs typeface="Arial" pitchFamily="34" charset="-120"/>
-              </a:rPr>
-              <a:t>Sleeves, pouches, totes and briefcases in metallised fabric. The benefit is physical, which is what made it provable. Global debut at the Swiss Pavilion, Expo 2020 Dubai.</a:t>
-            </a:r>
-            <a:endParaRPr lang="en-US" sz="1300" dirty="0"/>
-          </a:p>
-        </p:txBody>
-      </p:sp>
-      <p:sp>
-        <p:nvSpPr>
-          <p:cNvPr id="7" name="Text 5"/>
-          <p:cNvSpPr txBox="1"/>
-          <p:nvPr/>
-        </p:nvSpPr>
-        <p:spPr>
-          <a:xfrm>
-            <a:off x="685800" y="4000500"/>
-            <a:ext cx="1447495" cy="437998"/>
-          </a:xfrm>
-          <a:prstGeom prst="rect">
-            <a:avLst/>
-          </a:prstGeom>
-          <a:noFill/>
-          <a:ln/>
-        </p:spPr>
-        <p:txBody>
-          <a:bodyPr wrap="square" lIns="0" tIns="0" rIns="0" bIns="0" rtlCol="0" anchor="ctr"/>
-          <a:lstStyle/>
-          <a:p>
-            <a:pPr indent="0" marL="0">
-              <a:buNone/>
-            </a:pPr>
-            <a:r>
-              <a:rPr lang="en-US" sz="2850" b="1" dirty="0">
-                <a:solidFill>
-                  <a:srgbClr val="111111"/>
-                </a:solidFill>
-                <a:latin typeface="Arial" pitchFamily="34" charset="0"/>
-                <a:ea typeface="Arial" pitchFamily="34" charset="-122"/>
-                <a:cs typeface="Arial" pitchFamily="34" charset="-120"/>
-              </a:rPr>
-              <a:t>300k+</a:t>
-            </a:r>
-            <a:endParaRPr lang="en-US" sz="2850" dirty="0"/>
-          </a:p>
-        </p:txBody>
-      </p:sp>
-      <p:sp>
-        <p:nvSpPr>
-          <p:cNvPr id="8" name="Text 6"/>
-          <p:cNvSpPr txBox="1"/>
-          <p:nvPr/>
-        </p:nvSpPr>
-        <p:spPr>
-          <a:xfrm>
-            <a:off x="685800" y="4476902"/>
-            <a:ext cx="1410005" cy="381305"/>
+            <a:off x="6324905" y="5848502"/>
+            <a:ext cx="5486674" cy="437998"/>
           </a:xfrm>
           <a:prstGeom prst="rect">
             <a:avLst/>
@@ -5909,7 +5907,46 @@
               <a:buNone/>
             </a:pPr>
             <a:r>
-              <a:rPr lang="en-US" sz="950" b="1" spc="220" kern="0" dirty="0">
+              <a:rPr lang="en-US" sz="850" b="1" spc="240" kern="0" dirty="0">
+                <a:solidFill>
+                  <a:srgbClr val="54D2FE"/>
+                </a:solidFill>
+                <a:latin typeface="Arial" pitchFamily="34" charset="0"/>
+                <a:ea typeface="Arial" pitchFamily="34" charset="-122"/>
+                <a:cs typeface="Arial" pitchFamily="34" charset="-120"/>
+              </a:rPr>
+              <a:t>PAVILION AUDIENCE AT GLOBAL DEBUT</a:t>
+            </a:r>
+            <a:endParaRPr lang="en-US" sz="850" dirty="0"/>
+          </a:p>
+        </p:txBody>
+      </p:sp>
+      <p:sp>
+        <p:nvSpPr>
+          <p:cNvPr id="7" name="Text 5"/>
+          <p:cNvSpPr txBox="1"/>
+          <p:nvPr/>
+        </p:nvSpPr>
+        <p:spPr>
+          <a:xfrm>
+            <a:off x="685800" y="504749"/>
+            <a:ext cx="10820095" cy="190195"/>
+          </a:xfrm>
+          <a:prstGeom prst="rect">
+            <a:avLst/>
+          </a:prstGeom>
+          <a:noFill/>
+          <a:ln/>
+        </p:spPr>
+        <p:txBody>
+          <a:bodyPr wrap="square" lIns="0" tIns="0" rIns="0" bIns="0" rtlCol="0" anchor="ctr"/>
+          <a:lstStyle/>
+          <a:p>
+            <a:pPr indent="0" marL="0">
+              <a:buNone/>
+            </a:pPr>
+            <a:r>
+              <a:rPr lang="en-US" sz="950" b="1" spc="300" kern="0" dirty="0">
                 <a:solidFill>
                   <a:srgbClr val="8A8F98"/>
                 </a:solidFill>
@@ -5917,7 +5954,7 @@
                 <a:ea typeface="Arial" pitchFamily="34" charset="-122"/>
                 <a:cs typeface="Arial" pitchFamily="34" charset="-120"/>
               </a:rPr>
-              <a:t>PAVILION VISITORS</a:t>
+              <a:t>FERRONATO SWITZERLAND · SMART ACCESSORIES</a:t>
             </a:r>
             <a:endParaRPr lang="en-US" sz="950" dirty="0"/>
           </a:p>
@@ -5925,14 +5962,56 @@
       </p:sp>
       <p:sp>
         <p:nvSpPr>
+          <p:cNvPr id="8" name="Text 6"/>
+          <p:cNvSpPr txBox="1"/>
+          <p:nvPr/>
+        </p:nvSpPr>
+        <p:spPr>
+          <a:xfrm>
+            <a:off x="685800" y="800100"/>
+            <a:ext cx="4724705" cy="1181405"/>
+          </a:xfrm>
+          <a:prstGeom prst="rect">
+            <a:avLst/>
+          </a:prstGeom>
+          <a:noFill/>
+          <a:ln/>
+        </p:spPr>
+        <p:txBody>
+          <a:bodyPr wrap="square" lIns="0" tIns="0" rIns="0" bIns="0" rtlCol="0" anchor="t"/>
+          <a:lstStyle/>
+          <a:p>
+            <a:pPr indent="0" marL="0">
+              <a:lnSpc>
+                <a:spcPts val="2700"/>
+              </a:lnSpc>
+              <a:buNone/>
+            </a:pPr>
+            <a:r>
+              <a:rPr lang="en-US" sz="2250" b="1" dirty="0">
+                <a:solidFill>
+                  <a:srgbClr val="111111"/>
+                </a:solidFill>
+                <a:latin typeface="Arial" pitchFamily="34" charset="0"/>
+                <a:ea typeface="Arial" pitchFamily="34" charset="-122"/>
+                <a:cs typeface="Arial" pitchFamily="34" charset="-120"/>
+              </a:rPr>
+              <a:t>Privacy as a product, not a promise.</a:t>
+            </a:r>
+            <a:endParaRPr lang="en-US" sz="2250" dirty="0"/>
+          </a:p>
+        </p:txBody>
+      </p:sp>
+      <p:sp>
+        <p:nvSpPr>
           <p:cNvPr id="9" name="Text 7"/>
           <p:cNvSpPr txBox="1"/>
           <p:nvPr/>
         </p:nvSpPr>
         <p:spPr>
           <a:xfrm>
-            <a:off x="2286000" y="4000500"/>
-            <a:ext cx="1447495" cy="437998"/>
+            <a:off x="685800" y="2171700"/>
+            <a:ext cx="4724705" cy="170993"/>
           </a:xfrm>
           <a:prstGeom prst="rect">
             <a:avLst/>
@@ -5948,17 +6027,17 @@
               <a:buNone/>
             </a:pPr>
             <a:r>
-              <a:rPr lang="en-US" sz="2850" b="1" dirty="0">
-                <a:solidFill>
-                  <a:srgbClr val="111111"/>
-                </a:solidFill>
-                <a:latin typeface="Arial" pitchFamily="34" charset="0"/>
-                <a:ea typeface="Arial" pitchFamily="34" charset="-122"/>
-                <a:cs typeface="Arial" pitchFamily="34" charset="-120"/>
-              </a:rPr>
-              <a:t>2023</a:t>
-            </a:r>
-            <a:endParaRPr lang="en-US" sz="2850" dirty="0"/>
+              <a:rPr lang="en-US" sz="830" b="1" spc="260" kern="0" dirty="0">
+                <a:solidFill>
+                  <a:srgbClr val="8A8F98"/>
+                </a:solidFill>
+                <a:latin typeface="Arial" pitchFamily="34" charset="0"/>
+                <a:ea typeface="Arial" pitchFamily="34" charset="-122"/>
+                <a:cs typeface="Arial" pitchFamily="34" charset="-120"/>
+              </a:rPr>
+              <a:t>THE SITUATION</a:t>
+            </a:r>
+            <a:endParaRPr lang="en-US" sz="830" dirty="0"/>
           </a:p>
         </p:txBody>
       </p:sp>
@@ -5970,8 +6049,212 @@
         </p:nvSpPr>
         <p:spPr>
           <a:xfrm>
-            <a:off x="2286000" y="4476902"/>
-            <a:ext cx="1410005" cy="381305"/>
+            <a:off x="685800" y="2400300"/>
+            <a:ext cx="4724705" cy="742493"/>
+          </a:xfrm>
+          <a:prstGeom prst="rect">
+            <a:avLst/>
+          </a:prstGeom>
+          <a:noFill/>
+          <a:ln/>
+        </p:spPr>
+        <p:txBody>
+          <a:bodyPr wrap="square" lIns="0" tIns="0" rIns="0" bIns="0" rtlCol="0" anchor="t"/>
+          <a:lstStyle/>
+          <a:p>
+            <a:pPr indent="0" marL="0">
+              <a:lnSpc>
+                <a:spcPts val="1580"/>
+              </a:lnSpc>
+              <a:buNone/>
+            </a:pPr>
+            <a:r>
+              <a:rPr lang="en-US" sz="1150" dirty="0">
+                <a:solidFill>
+                  <a:srgbClr val="5A6068"/>
+                </a:solidFill>
+                <a:latin typeface="Arial" pitchFamily="34" charset="0"/>
+                <a:ea typeface="Arial" pitchFamily="34" charset="-122"/>
+                <a:cs typeface="Arial" pitchFamily="34" charset="-120"/>
+              </a:rPr>
+              <a:t>The same group’s industrial technology entering a lifestyle category where privacy was being promised by everyone and proven by no one.</a:t>
+            </a:r>
+            <a:endParaRPr lang="en-US" sz="1150" dirty="0"/>
+          </a:p>
+        </p:txBody>
+      </p:sp>
+      <p:sp>
+        <p:nvSpPr>
+          <p:cNvPr id="11" name="Text 9"/>
+          <p:cNvSpPr txBox="1"/>
+          <p:nvPr/>
+        </p:nvSpPr>
+        <p:spPr>
+          <a:xfrm>
+            <a:off x="685800" y="3295498"/>
+            <a:ext cx="4724705" cy="170993"/>
+          </a:xfrm>
+          <a:prstGeom prst="rect">
+            <a:avLst/>
+          </a:prstGeom>
+          <a:noFill/>
+          <a:ln/>
+        </p:spPr>
+        <p:txBody>
+          <a:bodyPr wrap="square" lIns="0" tIns="0" rIns="0" bIns="0" rtlCol="0" anchor="ctr"/>
+          <a:lstStyle/>
+          <a:p>
+            <a:pPr indent="0" marL="0">
+              <a:buNone/>
+            </a:pPr>
+            <a:r>
+              <a:rPr lang="en-US" sz="830" b="1" spc="260" kern="0" dirty="0">
+                <a:solidFill>
+                  <a:srgbClr val="8A8F98"/>
+                </a:solidFill>
+                <a:latin typeface="Arial" pitchFamily="34" charset="0"/>
+                <a:ea typeface="Arial" pitchFamily="34" charset="-122"/>
+                <a:cs typeface="Arial" pitchFamily="34" charset="-120"/>
+              </a:rPr>
+              <a:t>WHAT EOV DID</a:t>
+            </a:r>
+            <a:endParaRPr lang="en-US" sz="830" dirty="0"/>
+          </a:p>
+        </p:txBody>
+      </p:sp>
+      <p:sp>
+        <p:nvSpPr>
+          <p:cNvPr id="12" name="Text 10"/>
+          <p:cNvSpPr txBox="1"/>
+          <p:nvPr/>
+        </p:nvSpPr>
+        <p:spPr>
+          <a:xfrm>
+            <a:off x="685800" y="3524098"/>
+            <a:ext cx="4724705" cy="1162202"/>
+          </a:xfrm>
+          <a:prstGeom prst="rect">
+            <a:avLst/>
+          </a:prstGeom>
+          <a:noFill/>
+          <a:ln/>
+        </p:spPr>
+        <p:txBody>
+          <a:bodyPr wrap="square" lIns="0" tIns="0" rIns="0" bIns="0" rtlCol="0" anchor="t"/>
+          <a:lstStyle/>
+          <a:p>
+            <a:pPr indent="0" marL="0">
+              <a:lnSpc>
+                <a:spcPts val="1580"/>
+              </a:lnSpc>
+              <a:buNone/>
+            </a:pPr>
+            <a:r>
+              <a:rPr lang="en-US" sz="1150" dirty="0">
+                <a:solidFill>
+                  <a:srgbClr val="5A6068"/>
+                </a:solidFill>
+                <a:latin typeface="Arial" pitchFamily="34" charset="0"/>
+                <a:ea typeface="Arial" pitchFamily="34" charset="-122"/>
+                <a:cs typeface="Arial" pitchFamily="34" charset="-120"/>
+              </a:rPr>
+              <a:t>EOV built the brand on the one claim competitors could not copy: a benefit the buyer can test in their own hand. The product became the proof, and the launch was staged where Swiss credibility is already assumed — the Swiss Pavilion at Expo 2020 Dubai.</a:t>
+            </a:r>
+            <a:endParaRPr lang="en-US" sz="1150" dirty="0"/>
+          </a:p>
+        </p:txBody>
+      </p:sp>
+      <p:sp>
+        <p:nvSpPr>
+          <p:cNvPr id="13" name="Text 11"/>
+          <p:cNvSpPr txBox="1"/>
+          <p:nvPr/>
+        </p:nvSpPr>
+        <p:spPr>
+          <a:xfrm>
+            <a:off x="685800" y="4762195"/>
+            <a:ext cx="4724705" cy="170993"/>
+          </a:xfrm>
+          <a:prstGeom prst="rect">
+            <a:avLst/>
+          </a:prstGeom>
+          <a:noFill/>
+          <a:ln/>
+        </p:spPr>
+        <p:txBody>
+          <a:bodyPr wrap="square" lIns="0" tIns="0" rIns="0" bIns="0" rtlCol="0" anchor="ctr"/>
+          <a:lstStyle/>
+          <a:p>
+            <a:pPr indent="0" marL="0">
+              <a:buNone/>
+            </a:pPr>
+            <a:r>
+              <a:rPr lang="en-US" sz="830" b="1" spc="260" kern="0" dirty="0">
+                <a:solidFill>
+                  <a:srgbClr val="8A8F98"/>
+                </a:solidFill>
+                <a:latin typeface="Arial" pitchFamily="34" charset="0"/>
+                <a:ea typeface="Arial" pitchFamily="34" charset="-122"/>
+                <a:cs typeface="Arial" pitchFamily="34" charset="-120"/>
+              </a:rPr>
+              <a:t>WHAT CHANGED</a:t>
+            </a:r>
+            <a:endParaRPr lang="en-US" sz="830" dirty="0"/>
+          </a:p>
+        </p:txBody>
+      </p:sp>
+      <p:sp>
+        <p:nvSpPr>
+          <p:cNvPr id="14" name="Text 12"/>
+          <p:cNvSpPr txBox="1"/>
+          <p:nvPr/>
+        </p:nvSpPr>
+        <p:spPr>
+          <a:xfrm>
+            <a:off x="685800" y="4990795"/>
+            <a:ext cx="4724705" cy="742493"/>
+          </a:xfrm>
+          <a:prstGeom prst="rect">
+            <a:avLst/>
+          </a:prstGeom>
+          <a:noFill/>
+          <a:ln/>
+        </p:spPr>
+        <p:txBody>
+          <a:bodyPr wrap="square" lIns="0" tIns="0" rIns="0" bIns="0" rtlCol="0" anchor="t"/>
+          <a:lstStyle/>
+          <a:p>
+            <a:pPr indent="0" marL="0">
+              <a:lnSpc>
+                <a:spcPts val="1580"/>
+              </a:lnSpc>
+              <a:buNone/>
+            </a:pPr>
+            <a:r>
+              <a:rPr lang="en-US" sz="1150" dirty="0">
+                <a:solidFill>
+                  <a:srgbClr val="5A6068"/>
+                </a:solidFill>
+                <a:latin typeface="Arial" pitchFamily="34" charset="0"/>
+                <a:ea typeface="Arial" pitchFamily="34" charset="-122"/>
+                <a:cs typeface="Arial" pitchFamily="34" charset="-120"/>
+              </a:rPr>
+              <a:t>Global debut in front of a pavilion audience of 300,000+, four product lines in market, and the first Swiss boutique open by May 2023.</a:t>
+            </a:r>
+            <a:endParaRPr lang="en-US" sz="1150" dirty="0"/>
+          </a:p>
+        </p:txBody>
+      </p:sp>
+      <p:sp>
+        <p:nvSpPr>
+          <p:cNvPr id="15" name="Text 13"/>
+          <p:cNvSpPr txBox="1"/>
+          <p:nvPr/>
+        </p:nvSpPr>
+        <p:spPr>
+          <a:xfrm>
+            <a:off x="685800" y="5771693"/>
+            <a:ext cx="4724705" cy="342900"/>
           </a:xfrm>
           <a:prstGeom prst="rect">
             <a:avLst/>
@@ -5990,7 +6273,7 @@
               <a:buNone/>
             </a:pPr>
             <a:r>
-              <a:rPr lang="en-US" sz="950" b="1" spc="220" kern="0" dirty="0">
+              <a:rPr lang="en-US" sz="830" b="1" spc="160" kern="0" dirty="0">
                 <a:solidFill>
                   <a:srgbClr val="8A8F98"/>
                 </a:solidFill>
@@ -5998,96 +6281,15 @@
                 <a:ea typeface="Arial" pitchFamily="34" charset="-122"/>
                 <a:cs typeface="Arial" pitchFamily="34" charset="-120"/>
               </a:rPr>
-              <a:t>FIRST BOUTIQUE</a:t>
-            </a:r>
-            <a:endParaRPr lang="en-US" sz="950" dirty="0"/>
-          </a:p>
-        </p:txBody>
-      </p:sp>
-      <p:sp>
-        <p:nvSpPr>
-          <p:cNvPr id="11" name="Text 9"/>
-          <p:cNvSpPr txBox="1"/>
-          <p:nvPr/>
-        </p:nvSpPr>
-        <p:spPr>
-          <a:xfrm>
-            <a:off x="3886200" y="4000500"/>
-            <a:ext cx="1447495" cy="437998"/>
-          </a:xfrm>
-          <a:prstGeom prst="rect">
-            <a:avLst/>
-          </a:prstGeom>
-          <a:noFill/>
-          <a:ln/>
-        </p:spPr>
-        <p:txBody>
-          <a:bodyPr wrap="square" lIns="0" tIns="0" rIns="0" bIns="0" rtlCol="0" anchor="ctr"/>
-          <a:lstStyle/>
-          <a:p>
-            <a:pPr indent="0" marL="0">
-              <a:buNone/>
-            </a:pPr>
-            <a:r>
-              <a:rPr lang="en-US" sz="2850" b="1" dirty="0">
-                <a:solidFill>
-                  <a:srgbClr val="111111"/>
-                </a:solidFill>
-                <a:latin typeface="Arial" pitchFamily="34" charset="0"/>
-                <a:ea typeface="Arial" pitchFamily="34" charset="-122"/>
-                <a:cs typeface="Arial" pitchFamily="34" charset="-120"/>
-              </a:rPr>
-              <a:t>4</a:t>
-            </a:r>
-            <a:endParaRPr lang="en-US" sz="2850" dirty="0"/>
-          </a:p>
-        </p:txBody>
-      </p:sp>
-      <p:sp>
-        <p:nvSpPr>
-          <p:cNvPr id="12" name="Text 10"/>
-          <p:cNvSpPr txBox="1"/>
-          <p:nvPr/>
-        </p:nvSpPr>
-        <p:spPr>
-          <a:xfrm>
-            <a:off x="3886200" y="4476902"/>
-            <a:ext cx="1410005" cy="381305"/>
-          </a:xfrm>
-          <a:prstGeom prst="rect">
-            <a:avLst/>
-          </a:prstGeom>
-          <a:noFill/>
-          <a:ln/>
-        </p:spPr>
-        <p:txBody>
-          <a:bodyPr wrap="square" lIns="0" tIns="0" rIns="0" bIns="0" rtlCol="0" anchor="t"/>
-          <a:lstStyle/>
-          <a:p>
-            <a:pPr indent="0" marL="0">
-              <a:lnSpc>
-                <a:spcPts val="1200"/>
-              </a:lnSpc>
-              <a:buNone/>
-            </a:pPr>
-            <a:r>
-              <a:rPr lang="en-US" sz="950" b="1" spc="220" kern="0" dirty="0">
-                <a:solidFill>
-                  <a:srgbClr val="8A8F98"/>
-                </a:solidFill>
-                <a:latin typeface="Arial" pitchFamily="34" charset="0"/>
-                <a:ea typeface="Arial" pitchFamily="34" charset="-122"/>
-                <a:cs typeface="Arial" pitchFamily="34" charset="-120"/>
-              </a:rPr>
-              <a:t>PRODUCT LINES</a:t>
-            </a:r>
-            <a:endParaRPr lang="en-US" sz="950" dirty="0"/>
+              <a:t>Brand · product marketing · retail · film · PR · launch</a:t>
+            </a:r>
+            <a:endParaRPr lang="en-US" sz="830" dirty="0"/>
           </a:p>
         </p:txBody>
       </p:sp>
       <p:pic>
         <p:nvPicPr>
-          <p:cNvPr id="13" name="Image 0" descr="assets/eov-wordmark-black-sm.png">    </p:cNvPr>
+          <p:cNvPr id="16" name="Image 0" descr="assets/eov-wordmark-black-sm.png">    </p:cNvPr>
           <p:cNvPicPr>
             <a:picLocks noChangeAspect="1"/>
           </p:cNvPicPr>
@@ -6111,7 +6313,7 @@
       </p:pic>
       <p:sp>
         <p:nvSpPr>
-          <p:cNvPr id="14" name="Text 11"/>
+          <p:cNvPr id="17" name="Text 14"/>
           <p:cNvSpPr txBox="1"/>
           <p:nvPr/>
         </p:nvSpPr>
@@ -6587,8 +6789,8 @@
         </p:nvSpPr>
         <p:spPr>
           <a:xfrm>
-            <a:off x="685800" y="1714500"/>
-            <a:ext cx="8572500" cy="381305"/>
+            <a:off x="685800" y="1676095"/>
+            <a:ext cx="8572500" cy="571500"/>
           </a:xfrm>
           <a:prstGeom prst="rect">
             <a:avLst/>
@@ -6615,7 +6817,7 @@
                 <a:ea typeface="Arial" pitchFamily="34" charset="-122"/>
                 <a:cs typeface="Arial" pitchFamily="34" charset="-120"/>
               </a:rPr>
-              <a:t>Going untraceable, told through Santa.</a:t>
+              <a:t>The gift nobody thinks to ask for: an hour of being unreachable. One idea, carried across three films and a festive retail season.</a:t>
             </a:r>
             <a:endParaRPr lang="en-US" sz="1300" dirty="0"/>
           </a:p>
@@ -7566,7 +7768,7 @@
         </p:nvSpPr>
         <p:spPr>
           <a:xfrm>
-            <a:off x="6228893" y="3238805"/>
+            <a:off x="6228893" y="2171700"/>
             <a:ext cx="5676870" cy="381305"/>
           </a:xfrm>
           <a:prstGeom prst="rect">
@@ -7599,42 +7801,23 @@
       </p:sp>
       <p:sp>
         <p:nvSpPr>
-          <p:cNvPr id="4" name="Text 2"/>
-          <p:cNvSpPr txBox="1"/>
-          <p:nvPr/>
-        </p:nvSpPr>
-        <p:spPr>
-          <a:xfrm>
-            <a:off x="685800" y="504749"/>
-            <a:ext cx="10820095" cy="190195"/>
-          </a:xfrm>
-          <a:prstGeom prst="rect">
-            <a:avLst/>
-          </a:prstGeom>
-          <a:noFill/>
-          <a:ln/>
-        </p:spPr>
-        <p:txBody>
-          <a:bodyPr wrap="square" lIns="0" tIns="0" rIns="0" bIns="0" rtlCol="0" anchor="ctr"/>
-          <a:lstStyle/>
-          <a:p>
-            <a:pPr indent="0" marL="0">
-              <a:buNone/>
-            </a:pPr>
-            <a:r>
-              <a:rPr lang="en-US" sz="950" b="1" spc="300" kern="0" dirty="0">
-                <a:solidFill>
-                  <a:srgbClr val="8A8F98"/>
-                </a:solidFill>
-                <a:latin typeface="Arial" pitchFamily="34" charset="0"/>
-                <a:ea typeface="Arial" pitchFamily="34" charset="-122"/>
-                <a:cs typeface="Arial" pitchFamily="34" charset="-120"/>
-              </a:rPr>
-              <a:t>OPEC · UAE NIGHT, VIENNA</a:t>
-            </a:r>
-            <a:endParaRPr lang="en-US" sz="950" dirty="0"/>
-          </a:p>
-        </p:txBody>
+          <p:cNvPr id="4" name="Shape 2"/>
+          <p:cNvSpPr/>
+          <p:nvPr/>
+        </p:nvSpPr>
+        <p:spPr>
+          <a:xfrm>
+            <a:off x="5943600" y="4742993"/>
+            <a:ext cx="6248370" cy="2115007"/>
+          </a:xfrm>
+          <a:prstGeom prst="rect">
+            <a:avLst/>
+          </a:prstGeom>
+          <a:solidFill>
+            <a:srgbClr val="000000"/>
+          </a:solidFill>
+          <a:ln/>
+        </p:spPr>
       </p:sp>
       <p:sp>
         <p:nvSpPr>
@@ -7644,8 +7827,8 @@
         </p:nvSpPr>
         <p:spPr>
           <a:xfrm>
-            <a:off x="685800" y="800100"/>
-            <a:ext cx="4762195" cy="1809598"/>
+            <a:off x="6324905" y="5067605"/>
+            <a:ext cx="5486674" cy="724205"/>
           </a:xfrm>
           <a:prstGeom prst="rect">
             <a:avLst/>
@@ -7658,23 +7841,20 @@
           <a:lstStyle/>
           <a:p>
             <a:pPr indent="0" marL="0">
-              <a:lnSpc>
-                <a:spcPts val="3080"/>
-              </a:lnSpc>
-              <a:buNone/>
-            </a:pPr>
-            <a:r>
-              <a:rPr lang="en-US" sz="2850" b="1" dirty="0">
-                <a:solidFill>
-                  <a:srgbClr val="111111"/>
-                </a:solidFill>
-                <a:latin typeface="Arial" pitchFamily="34" charset="0"/>
-                <a:ea typeface="Arial" pitchFamily="34" charset="-122"/>
-                <a:cs typeface="Arial" pitchFamily="34" charset="-120"/>
-              </a:rPr>
-              <a:t>A national event, delivered in a foreign capital.</a:t>
-            </a:r>
-            <a:endParaRPr lang="en-US" sz="2850" dirty="0"/>
+              <a:buNone/>
+            </a:pPr>
+            <a:r>
+              <a:rPr lang="en-US" sz="3750" b="1" dirty="0">
+                <a:solidFill>
+                  <a:srgbClr val="FFFFFF"/>
+                </a:solidFill>
+                <a:latin typeface="Arial" pitchFamily="34" charset="0"/>
+                <a:ea typeface="Arial" pitchFamily="34" charset="-122"/>
+                <a:cs typeface="Arial" pitchFamily="34" charset="-120"/>
+              </a:rPr>
+              <a:t>700+</a:t>
+            </a:r>
+            <a:endParaRPr lang="en-US" sz="3750" dirty="0"/>
           </a:p>
         </p:txBody>
       </p:sp>
@@ -7686,89 +7866,8 @@
         </p:nvSpPr>
         <p:spPr>
           <a:xfrm>
-            <a:off x="685800" y="2381098"/>
-            <a:ext cx="4762195" cy="1047902"/>
-          </a:xfrm>
-          <a:prstGeom prst="rect">
-            <a:avLst/>
-          </a:prstGeom>
-          <a:noFill/>
-          <a:ln/>
-        </p:spPr>
-        <p:txBody>
-          <a:bodyPr wrap="square" lIns="0" tIns="0" rIns="0" bIns="0" rtlCol="0" anchor="t"/>
-          <a:lstStyle/>
-          <a:p>
-            <a:pPr indent="0" marL="0">
-              <a:lnSpc>
-                <a:spcPts val="1950"/>
-              </a:lnSpc>
-              <a:buNone/>
-            </a:pPr>
-            <a:r>
-              <a:rPr lang="en-US" sz="1300" dirty="0">
-                <a:solidFill>
-                  <a:srgbClr val="5A6068"/>
-                </a:solidFill>
-                <a:latin typeface="Arial" pitchFamily="34" charset="0"/>
-                <a:ea typeface="Arial" pitchFamily="34" charset="-122"/>
-                <a:cs typeface="Arial" pitchFamily="34" charset="-120"/>
-              </a:rPr>
-              <a:t>Organised by EOV in partnership with H.E. Suhail Al Mazrouei, Minister of Energy. A fixed date in the OPEC calendar, in a city with none of a home market's suppliers or margins for error.</a:t>
-            </a:r>
-            <a:endParaRPr lang="en-US" sz="1300" dirty="0"/>
-          </a:p>
-        </p:txBody>
-      </p:sp>
-      <p:sp>
-        <p:nvSpPr>
-          <p:cNvPr id="7" name="Text 5"/>
-          <p:cNvSpPr txBox="1"/>
-          <p:nvPr/>
-        </p:nvSpPr>
-        <p:spPr>
-          <a:xfrm>
-            <a:off x="685800" y="4000500"/>
-            <a:ext cx="1447495" cy="437998"/>
-          </a:xfrm>
-          <a:prstGeom prst="rect">
-            <a:avLst/>
-          </a:prstGeom>
-          <a:noFill/>
-          <a:ln/>
-        </p:spPr>
-        <p:txBody>
-          <a:bodyPr wrap="square" lIns="0" tIns="0" rIns="0" bIns="0" rtlCol="0" anchor="ctr"/>
-          <a:lstStyle/>
-          <a:p>
-            <a:pPr indent="0" marL="0">
-              <a:buNone/>
-            </a:pPr>
-            <a:r>
-              <a:rPr lang="en-US" sz="2850" b="1" dirty="0">
-                <a:solidFill>
-                  <a:srgbClr val="111111"/>
-                </a:solidFill>
-                <a:latin typeface="Arial" pitchFamily="34" charset="0"/>
-                <a:ea typeface="Arial" pitchFamily="34" charset="-122"/>
-                <a:cs typeface="Arial" pitchFamily="34" charset="-120"/>
-              </a:rPr>
-              <a:t>Vienna</a:t>
-            </a:r>
-            <a:endParaRPr lang="en-US" sz="2850" dirty="0"/>
-          </a:p>
-        </p:txBody>
-      </p:sp>
-      <p:sp>
-        <p:nvSpPr>
-          <p:cNvPr id="8" name="Text 6"/>
-          <p:cNvSpPr txBox="1"/>
-          <p:nvPr/>
-        </p:nvSpPr>
-        <p:spPr>
-          <a:xfrm>
-            <a:off x="685800" y="4476902"/>
-            <a:ext cx="1410005" cy="381305"/>
+            <a:off x="6324905" y="5848502"/>
+            <a:ext cx="5486674" cy="437998"/>
           </a:xfrm>
           <a:prstGeom prst="rect">
             <a:avLst/>
@@ -7787,7 +7886,46 @@
               <a:buNone/>
             </a:pPr>
             <a:r>
-              <a:rPr lang="en-US" sz="950" b="1" spc="220" kern="0" dirty="0">
+              <a:rPr lang="en-US" sz="850" b="1" spc="240" kern="0" dirty="0">
+                <a:solidFill>
+                  <a:srgbClr val="54D2FE"/>
+                </a:solidFill>
+                <a:latin typeface="Arial" pitchFamily="34" charset="0"/>
+                <a:ea typeface="Arial" pitchFamily="34" charset="-122"/>
+                <a:cs typeface="Arial" pitchFamily="34" charset="-120"/>
+              </a:rPr>
+              <a:t>DELEGATES HOSTED · UAE NIGHT</a:t>
+            </a:r>
+            <a:endParaRPr lang="en-US" sz="850" dirty="0"/>
+          </a:p>
+        </p:txBody>
+      </p:sp>
+      <p:sp>
+        <p:nvSpPr>
+          <p:cNvPr id="7" name="Text 5"/>
+          <p:cNvSpPr txBox="1"/>
+          <p:nvPr/>
+        </p:nvSpPr>
+        <p:spPr>
+          <a:xfrm>
+            <a:off x="685800" y="504749"/>
+            <a:ext cx="10820095" cy="190195"/>
+          </a:xfrm>
+          <a:prstGeom prst="rect">
+            <a:avLst/>
+          </a:prstGeom>
+          <a:noFill/>
+          <a:ln/>
+        </p:spPr>
+        <p:txBody>
+          <a:bodyPr wrap="square" lIns="0" tIns="0" rIns="0" bIns="0" rtlCol="0" anchor="ctr"/>
+          <a:lstStyle/>
+          <a:p>
+            <a:pPr indent="0" marL="0">
+              <a:buNone/>
+            </a:pPr>
+            <a:r>
+              <a:rPr lang="en-US" sz="950" b="1" spc="300" kern="0" dirty="0">
                 <a:solidFill>
                   <a:srgbClr val="8A8F98"/>
                 </a:solidFill>
@@ -7795,7 +7933,7 @@
                 <a:ea typeface="Arial" pitchFamily="34" charset="-122"/>
                 <a:cs typeface="Arial" pitchFamily="34" charset="-120"/>
               </a:rPr>
-              <a:t>FOREIGN CAPITAL</a:t>
+              <a:t>OPEC · UAE NIGHT, VIENNA</a:t>
             </a:r>
             <a:endParaRPr lang="en-US" sz="950" dirty="0"/>
           </a:p>
@@ -7803,14 +7941,56 @@
       </p:sp>
       <p:sp>
         <p:nvSpPr>
+          <p:cNvPr id="8" name="Text 6"/>
+          <p:cNvSpPr txBox="1"/>
+          <p:nvPr/>
+        </p:nvSpPr>
+        <p:spPr>
+          <a:xfrm>
+            <a:off x="685800" y="800100"/>
+            <a:ext cx="4724705" cy="1181405"/>
+          </a:xfrm>
+          <a:prstGeom prst="rect">
+            <a:avLst/>
+          </a:prstGeom>
+          <a:noFill/>
+          <a:ln/>
+        </p:spPr>
+        <p:txBody>
+          <a:bodyPr wrap="square" lIns="0" tIns="0" rIns="0" bIns="0" rtlCol="0" anchor="t"/>
+          <a:lstStyle/>
+          <a:p>
+            <a:pPr indent="0" marL="0">
+              <a:lnSpc>
+                <a:spcPts val="2700"/>
+              </a:lnSpc>
+              <a:buNone/>
+            </a:pPr>
+            <a:r>
+              <a:rPr lang="en-US" sz="2250" b="1" dirty="0">
+                <a:solidFill>
+                  <a:srgbClr val="111111"/>
+                </a:solidFill>
+                <a:latin typeface="Arial" pitchFamily="34" charset="0"/>
+                <a:ea typeface="Arial" pitchFamily="34" charset="-122"/>
+                <a:cs typeface="Arial" pitchFamily="34" charset="-120"/>
+              </a:rPr>
+              <a:t>A national event, delivered in a foreign capital.</a:t>
+            </a:r>
+            <a:endParaRPr lang="en-US" sz="2250" dirty="0"/>
+          </a:p>
+        </p:txBody>
+      </p:sp>
+      <p:sp>
+        <p:nvSpPr>
           <p:cNvPr id="9" name="Text 7"/>
           <p:cNvSpPr txBox="1"/>
           <p:nvPr/>
         </p:nvSpPr>
         <p:spPr>
           <a:xfrm>
-            <a:off x="2286000" y="4000500"/>
-            <a:ext cx="1447495" cy="437998"/>
+            <a:off x="685800" y="2171700"/>
+            <a:ext cx="4724705" cy="170993"/>
           </a:xfrm>
           <a:prstGeom prst="rect">
             <a:avLst/>
@@ -7826,17 +8006,17 @@
               <a:buNone/>
             </a:pPr>
             <a:r>
-              <a:rPr lang="en-US" sz="2850" b="1" dirty="0">
-                <a:solidFill>
-                  <a:srgbClr val="111111"/>
-                </a:solidFill>
-                <a:latin typeface="Arial" pitchFamily="34" charset="0"/>
-                <a:ea typeface="Arial" pitchFamily="34" charset="-122"/>
-                <a:cs typeface="Arial" pitchFamily="34" charset="-120"/>
-              </a:rPr>
-              <a:t>Fixed</a:t>
-            </a:r>
-            <a:endParaRPr lang="en-US" sz="2850" dirty="0"/>
+              <a:rPr lang="en-US" sz="830" b="1" spc="260" kern="0" dirty="0">
+                <a:solidFill>
+                  <a:srgbClr val="8A8F98"/>
+                </a:solidFill>
+                <a:latin typeface="Arial" pitchFamily="34" charset="0"/>
+                <a:ea typeface="Arial" pitchFamily="34" charset="-122"/>
+                <a:cs typeface="Arial" pitchFamily="34" charset="-120"/>
+              </a:rPr>
+              <a:t>THE SITUATION</a:t>
+            </a:r>
+            <a:endParaRPr lang="en-US" sz="830" dirty="0"/>
           </a:p>
         </p:txBody>
       </p:sp>
@@ -7848,8 +8028,212 @@
         </p:nvSpPr>
         <p:spPr>
           <a:xfrm>
-            <a:off x="2286000" y="4476902"/>
-            <a:ext cx="1410005" cy="381305"/>
+            <a:off x="685800" y="2400300"/>
+            <a:ext cx="4724705" cy="742493"/>
+          </a:xfrm>
+          <a:prstGeom prst="rect">
+            <a:avLst/>
+          </a:prstGeom>
+          <a:noFill/>
+          <a:ln/>
+        </p:spPr>
+        <p:txBody>
+          <a:bodyPr wrap="square" lIns="0" tIns="0" rIns="0" bIns="0" rtlCol="0" anchor="t"/>
+          <a:lstStyle/>
+          <a:p>
+            <a:pPr indent="0" marL="0">
+              <a:lnSpc>
+                <a:spcPts val="1580"/>
+              </a:lnSpc>
+              <a:buNone/>
+            </a:pPr>
+            <a:r>
+              <a:rPr lang="en-US" sz="1150" dirty="0">
+                <a:solidFill>
+                  <a:srgbClr val="5A6068"/>
+                </a:solidFill>
+                <a:latin typeface="Arial" pitchFamily="34" charset="0"/>
+                <a:ea typeface="Arial" pitchFamily="34" charset="-122"/>
+                <a:cs typeface="Arial" pitchFamily="34" charset="-120"/>
+              </a:rPr>
+              <a:t>A fixed date in the OPEC calendar at the Hofburg, Vienna, hosting ministers, diplomats and international media — with none of a home market’s suppliers to fall back on.</a:t>
+            </a:r>
+            <a:endParaRPr lang="en-US" sz="1150" dirty="0"/>
+          </a:p>
+        </p:txBody>
+      </p:sp>
+      <p:sp>
+        <p:nvSpPr>
+          <p:cNvPr id="11" name="Text 9"/>
+          <p:cNvSpPr txBox="1"/>
+          <p:nvPr/>
+        </p:nvSpPr>
+        <p:spPr>
+          <a:xfrm>
+            <a:off x="685800" y="3295498"/>
+            <a:ext cx="4724705" cy="170993"/>
+          </a:xfrm>
+          <a:prstGeom prst="rect">
+            <a:avLst/>
+          </a:prstGeom>
+          <a:noFill/>
+          <a:ln/>
+        </p:spPr>
+        <p:txBody>
+          <a:bodyPr wrap="square" lIns="0" tIns="0" rIns="0" bIns="0" rtlCol="0" anchor="ctr"/>
+          <a:lstStyle/>
+          <a:p>
+            <a:pPr indent="0" marL="0">
+              <a:buNone/>
+            </a:pPr>
+            <a:r>
+              <a:rPr lang="en-US" sz="830" b="1" spc="260" kern="0" dirty="0">
+                <a:solidFill>
+                  <a:srgbClr val="8A8F98"/>
+                </a:solidFill>
+                <a:latin typeface="Arial" pitchFamily="34" charset="0"/>
+                <a:ea typeface="Arial" pitchFamily="34" charset="-122"/>
+                <a:cs typeface="Arial" pitchFamily="34" charset="-120"/>
+              </a:rPr>
+              <a:t>WHAT EOV DID</a:t>
+            </a:r>
+            <a:endParaRPr lang="en-US" sz="830" dirty="0"/>
+          </a:p>
+        </p:txBody>
+      </p:sp>
+      <p:sp>
+        <p:nvSpPr>
+          <p:cNvPr id="12" name="Text 10"/>
+          <p:cNvSpPr txBox="1"/>
+          <p:nvPr/>
+        </p:nvSpPr>
+        <p:spPr>
+          <a:xfrm>
+            <a:off x="685800" y="3524098"/>
+            <a:ext cx="4724705" cy="1162202"/>
+          </a:xfrm>
+          <a:prstGeom prst="rect">
+            <a:avLst/>
+          </a:prstGeom>
+          <a:noFill/>
+          <a:ln/>
+        </p:spPr>
+        <p:txBody>
+          <a:bodyPr wrap="square" lIns="0" tIns="0" rIns="0" bIns="0" rtlCol="0" anchor="t"/>
+          <a:lstStyle/>
+          <a:p>
+            <a:pPr indent="0" marL="0">
+              <a:lnSpc>
+                <a:spcPts val="1580"/>
+              </a:lnSpc>
+              <a:buNone/>
+            </a:pPr>
+            <a:r>
+              <a:rPr lang="en-US" sz="1150" dirty="0">
+                <a:solidFill>
+                  <a:srgbClr val="5A6068"/>
+                </a:solidFill>
+                <a:latin typeface="Arial" pitchFamily="34" charset="0"/>
+                <a:ea typeface="Arial" pitchFamily="34" charset="-122"/>
+                <a:cs typeface="Arial" pitchFamily="34" charset="-120"/>
+              </a:rPr>
+              <a:t>EOV treated the room as the deliverable and worked backwards from it. Protocol was settled before any creative decision was taken, and sourcing, production and rehearsal were built in Vienna to a standard set in Abu Dhabi.</a:t>
+            </a:r>
+            <a:endParaRPr lang="en-US" sz="1150" dirty="0"/>
+          </a:p>
+        </p:txBody>
+      </p:sp>
+      <p:sp>
+        <p:nvSpPr>
+          <p:cNvPr id="13" name="Text 11"/>
+          <p:cNvSpPr txBox="1"/>
+          <p:nvPr/>
+        </p:nvSpPr>
+        <p:spPr>
+          <a:xfrm>
+            <a:off x="685800" y="4762195"/>
+            <a:ext cx="4724705" cy="170993"/>
+          </a:xfrm>
+          <a:prstGeom prst="rect">
+            <a:avLst/>
+          </a:prstGeom>
+          <a:noFill/>
+          <a:ln/>
+        </p:spPr>
+        <p:txBody>
+          <a:bodyPr wrap="square" lIns="0" tIns="0" rIns="0" bIns="0" rtlCol="0" anchor="ctr"/>
+          <a:lstStyle/>
+          <a:p>
+            <a:pPr indent="0" marL="0">
+              <a:buNone/>
+            </a:pPr>
+            <a:r>
+              <a:rPr lang="en-US" sz="830" b="1" spc="260" kern="0" dirty="0">
+                <a:solidFill>
+                  <a:srgbClr val="8A8F98"/>
+                </a:solidFill>
+                <a:latin typeface="Arial" pitchFamily="34" charset="0"/>
+                <a:ea typeface="Arial" pitchFamily="34" charset="-122"/>
+                <a:cs typeface="Arial" pitchFamily="34" charset="-120"/>
+              </a:rPr>
+              <a:t>WHAT CHANGED</a:t>
+            </a:r>
+            <a:endParaRPr lang="en-US" sz="830" dirty="0"/>
+          </a:p>
+        </p:txBody>
+      </p:sp>
+      <p:sp>
+        <p:nvSpPr>
+          <p:cNvPr id="14" name="Text 12"/>
+          <p:cNvSpPr txBox="1"/>
+          <p:nvPr/>
+        </p:nvSpPr>
+        <p:spPr>
+          <a:xfrm>
+            <a:off x="685800" y="4990795"/>
+            <a:ext cx="4724705" cy="742493"/>
+          </a:xfrm>
+          <a:prstGeom prst="rect">
+            <a:avLst/>
+          </a:prstGeom>
+          <a:noFill/>
+          <a:ln/>
+        </p:spPr>
+        <p:txBody>
+          <a:bodyPr wrap="square" lIns="0" tIns="0" rIns="0" bIns="0" rtlCol="0" anchor="t"/>
+          <a:lstStyle/>
+          <a:p>
+            <a:pPr indent="0" marL="0">
+              <a:lnSpc>
+                <a:spcPts val="1580"/>
+              </a:lnSpc>
+              <a:buNone/>
+            </a:pPr>
+            <a:r>
+              <a:rPr lang="en-US" sz="1150" dirty="0">
+                <a:solidFill>
+                  <a:srgbClr val="5A6068"/>
+                </a:solidFill>
+                <a:latin typeface="Arial" pitchFamily="34" charset="0"/>
+                <a:ea typeface="Arial" pitchFamily="34" charset="-122"/>
+                <a:cs typeface="Arial" pitchFamily="34" charset="-120"/>
+              </a:rPr>
+              <a:t>700+ delegates hosted at UAE Night, in partnership with H.E. Suhail Al Mazrouei, Minister of Energy.</a:t>
+            </a:r>
+            <a:endParaRPr lang="en-US" sz="1150" dirty="0"/>
+          </a:p>
+        </p:txBody>
+      </p:sp>
+      <p:sp>
+        <p:nvSpPr>
+          <p:cNvPr id="15" name="Text 13"/>
+          <p:cNvSpPr txBox="1"/>
+          <p:nvPr/>
+        </p:nvSpPr>
+        <p:spPr>
+          <a:xfrm>
+            <a:off x="685800" y="5771693"/>
+            <a:ext cx="4724705" cy="342900"/>
           </a:xfrm>
           <a:prstGeom prst="rect">
             <a:avLst/>
@@ -7868,7 +8252,7 @@
               <a:buNone/>
             </a:pPr>
             <a:r>
-              <a:rPr lang="en-US" sz="950" b="1" spc="220" kern="0" dirty="0">
+              <a:rPr lang="en-US" sz="830" b="1" spc="160" kern="0" dirty="0">
                 <a:solidFill>
                   <a:srgbClr val="8A8F98"/>
                 </a:solidFill>
@@ -7876,96 +8260,15 @@
                 <a:ea typeface="Arial" pitchFamily="34" charset="-122"/>
                 <a:cs typeface="Arial" pitchFamily="34" charset="-120"/>
               </a:rPr>
-              <a:t>DATE</a:t>
-            </a:r>
-            <a:endParaRPr lang="en-US" sz="950" dirty="0"/>
-          </a:p>
-        </p:txBody>
-      </p:sp>
-      <p:sp>
-        <p:nvSpPr>
-          <p:cNvPr id="11" name="Text 9"/>
-          <p:cNvSpPr txBox="1"/>
-          <p:nvPr/>
-        </p:nvSpPr>
-        <p:spPr>
-          <a:xfrm>
-            <a:off x="3886200" y="4000500"/>
-            <a:ext cx="1447495" cy="437998"/>
-          </a:xfrm>
-          <a:prstGeom prst="rect">
-            <a:avLst/>
-          </a:prstGeom>
-          <a:noFill/>
-          <a:ln/>
-        </p:spPr>
-        <p:txBody>
-          <a:bodyPr wrap="square" lIns="0" tIns="0" rIns="0" bIns="0" rtlCol="0" anchor="ctr"/>
-          <a:lstStyle/>
-          <a:p>
-            <a:pPr indent="0" marL="0">
-              <a:buNone/>
-            </a:pPr>
-            <a:r>
-              <a:rPr lang="en-US" sz="2850" b="1" dirty="0">
-                <a:solidFill>
-                  <a:srgbClr val="111111"/>
-                </a:solidFill>
-                <a:latin typeface="Arial" pitchFamily="34" charset="0"/>
-                <a:ea typeface="Arial" pitchFamily="34" charset="-122"/>
-                <a:cs typeface="Arial" pitchFamily="34" charset="-120"/>
-              </a:rPr>
-              <a:t>H.E.</a:t>
-            </a:r>
-            <a:endParaRPr lang="en-US" sz="2850" dirty="0"/>
-          </a:p>
-        </p:txBody>
-      </p:sp>
-      <p:sp>
-        <p:nvSpPr>
-          <p:cNvPr id="12" name="Text 10"/>
-          <p:cNvSpPr txBox="1"/>
-          <p:nvPr/>
-        </p:nvSpPr>
-        <p:spPr>
-          <a:xfrm>
-            <a:off x="3886200" y="4476902"/>
-            <a:ext cx="1410005" cy="381305"/>
-          </a:xfrm>
-          <a:prstGeom prst="rect">
-            <a:avLst/>
-          </a:prstGeom>
-          <a:noFill/>
-          <a:ln/>
-        </p:spPr>
-        <p:txBody>
-          <a:bodyPr wrap="square" lIns="0" tIns="0" rIns="0" bIns="0" rtlCol="0" anchor="t"/>
-          <a:lstStyle/>
-          <a:p>
-            <a:pPr indent="0" marL="0">
-              <a:lnSpc>
-                <a:spcPts val="1200"/>
-              </a:lnSpc>
-              <a:buNone/>
-            </a:pPr>
-            <a:r>
-              <a:rPr lang="en-US" sz="950" b="1" spc="220" kern="0" dirty="0">
-                <a:solidFill>
-                  <a:srgbClr val="8A8F98"/>
-                </a:solidFill>
-                <a:latin typeface="Arial" pitchFamily="34" charset="0"/>
-                <a:ea typeface="Arial" pitchFamily="34" charset="-122"/>
-                <a:cs typeface="Arial" pitchFamily="34" charset="-120"/>
-              </a:rPr>
-              <a:t>MINISTERIAL PARTNER</a:t>
-            </a:r>
-            <a:endParaRPr lang="en-US" sz="950" dirty="0"/>
+              <a:t>Event strategy · protocol · production · content · media</a:t>
+            </a:r>
+            <a:endParaRPr lang="en-US" sz="830" dirty="0"/>
           </a:p>
         </p:txBody>
       </p:sp>
       <p:pic>
         <p:nvPicPr>
-          <p:cNvPr id="13" name="Image 0" descr="assets/eov-wordmark-black-sm.png">    </p:cNvPr>
+          <p:cNvPr id="16" name="Image 0" descr="assets/eov-wordmark-black-sm.png">    </p:cNvPr>
           <p:cNvPicPr>
             <a:picLocks noChangeAspect="1"/>
           </p:cNvPicPr>
@@ -7989,7 +8292,7 @@
       </p:pic>
       <p:sp>
         <p:nvSpPr>
-          <p:cNvPr id="14" name="Text 11"/>
+          <p:cNvPr id="17" name="Text 14"/>
           <p:cNvSpPr txBox="1"/>
           <p:nvPr/>
         </p:nvSpPr>
@@ -8525,7 +8828,7 @@
         <p:spPr>
           <a:xfrm>
             <a:off x="685800" y="2952598"/>
-            <a:ext cx="4762195" cy="571500"/>
+            <a:ext cx="4762195" cy="1143000"/>
           </a:xfrm>
           <a:prstGeom prst="rect">
             <a:avLst/>
@@ -8552,7 +8855,7 @@
                 <a:ea typeface="Arial" pitchFamily="34" charset="-122"/>
                 <a:cs typeface="Arial" pitchFamily="34" charset="-120"/>
               </a:rPr>
-              <a:t>Abu Dhabi office · Dubai production facility. Six disciplines under one team.</a:t>
+              <a:t>Abu Dhabi office, Dubai production facility. Six disciplines under one team and one contract — which is what turns single accountability from a claim into a structure.</a:t>
             </a:r>
             <a:endParaRPr lang="en-US" sz="1300" dirty="0"/>
           </a:p>
@@ -11527,7 +11830,7 @@
                 <a:ea typeface="Arial" pitchFamily="34" charset="-122"/>
                 <a:cs typeface="Arial" pitchFamily="34" charset="-120"/>
               </a:rPr>
-              <a:t>[CONFIRM WHICH]</a:t>
+              <a:t>Specialist production and media depth</a:t>
             </a:r>
             <a:endParaRPr lang="en-US" sz="1250" dirty="0"/>
           </a:p>
@@ -11566,7 +11869,124 @@
                 <a:ea typeface="Arial" pitchFamily="34" charset="-122"/>
                 <a:cs typeface="Arial" pitchFamily="34" charset="-120"/>
               </a:rPr>
-              <a:t>Named partners disclosed on every engagement.</a:t>
+              <a:t>Brought in by name, on the record, and</a:t>
+            </a:r>
+            <a:endParaRPr lang="en-US" sz="1250" dirty="0"/>
+          </a:p>
+        </p:txBody>
+      </p:sp>
+      <p:sp>
+        <p:nvSpPr>
+          <p:cNvPr id="16" name="Text 14"/>
+          <p:cNvSpPr txBox="1"/>
+          <p:nvPr/>
+        </p:nvSpPr>
+        <p:spPr>
+          <a:xfrm>
+            <a:off x="6552590" y="3609137"/>
+            <a:ext cx="4667098" cy="323698"/>
+          </a:xfrm>
+          <a:prstGeom prst="rect">
+            <a:avLst/>
+          </a:prstGeom>
+          <a:noFill/>
+          <a:ln/>
+        </p:spPr>
+        <p:txBody>
+          <a:bodyPr wrap="square" lIns="0" tIns="0" rIns="0" bIns="0" rtlCol="0" anchor="t"/>
+          <a:lstStyle/>
+          <a:p>
+            <a:pPr indent="0" marL="0">
+              <a:buNone/>
+            </a:pPr>
+            <a:r>
+              <a:rPr lang="en-US" sz="1250" dirty="0">
+                <a:solidFill>
+                  <a:srgbClr val="FFFFFF"/>
+                </a:solidFill>
+                <a:latin typeface="Arial" pitchFamily="34" charset="0"/>
+                <a:ea typeface="Arial" pitchFamily="34" charset="-122"/>
+                <a:cs typeface="Arial" pitchFamily="34" charset="-120"/>
+              </a:rPr>
+              <a:t>disclosed on every engagement.</a:t>
+            </a:r>
+            <a:endParaRPr lang="en-US" sz="1250" dirty="0"/>
+          </a:p>
+        </p:txBody>
+      </p:sp>
+      <p:sp>
+        <p:nvSpPr>
+          <p:cNvPr id="17" name="Text 15"/>
+          <p:cNvSpPr txBox="1"/>
+          <p:nvPr/>
+        </p:nvSpPr>
+        <p:spPr>
+          <a:xfrm>
+            <a:off x="6552590" y="4008730"/>
+            <a:ext cx="4667098" cy="323698"/>
+          </a:xfrm>
+          <a:prstGeom prst="rect">
+            <a:avLst/>
+          </a:prstGeom>
+          <a:noFill/>
+          <a:ln/>
+        </p:spPr>
+        <p:txBody>
+          <a:bodyPr wrap="square" lIns="0" tIns="0" rIns="0" bIns="0" rtlCol="0" anchor="t"/>
+          <a:lstStyle/>
+          <a:p>
+            <a:pPr indent="0" marL="0">
+              <a:buNone/>
+            </a:pPr>
+            <a:r>
+              <a:rPr lang="en-US" sz="1250" dirty="0">
+                <a:solidFill>
+                  <a:srgbClr val="FFFFFF"/>
+                </a:solidFill>
+                <a:latin typeface="Arial" pitchFamily="34" charset="0"/>
+                <a:ea typeface="Arial" pitchFamily="34" charset="-122"/>
+                <a:cs typeface="Arial" pitchFamily="34" charset="-120"/>
+              </a:rPr>
+              <a:t>Never sub-contracted quietly, and never</a:t>
+            </a:r>
+            <a:endParaRPr lang="en-US" sz="1250" dirty="0"/>
+          </a:p>
+        </p:txBody>
+      </p:sp>
+      <p:sp>
+        <p:nvSpPr>
+          <p:cNvPr id="18" name="Text 16"/>
+          <p:cNvSpPr txBox="1"/>
+          <p:nvPr/>
+        </p:nvSpPr>
+        <p:spPr>
+          <a:xfrm>
+            <a:off x="6552590" y="4408322"/>
+            <a:ext cx="4667098" cy="323698"/>
+          </a:xfrm>
+          <a:prstGeom prst="rect">
+            <a:avLst/>
+          </a:prstGeom>
+          <a:noFill/>
+          <a:ln/>
+        </p:spPr>
+        <p:txBody>
+          <a:bodyPr wrap="square" lIns="0" tIns="0" rIns="0" bIns="0" rtlCol="0" anchor="t"/>
+          <a:lstStyle/>
+          <a:p>
+            <a:pPr indent="0" marL="0">
+              <a:buNone/>
+            </a:pPr>
+            <a:r>
+              <a:rPr lang="en-US" sz="1250" dirty="0">
+                <a:solidFill>
+                  <a:srgbClr val="FFFFFF"/>
+                </a:solidFill>
+                <a:latin typeface="Arial" pitchFamily="34" charset="0"/>
+                <a:ea typeface="Arial" pitchFamily="34" charset="-122"/>
+                <a:cs typeface="Arial" pitchFamily="34" charset="-120"/>
+              </a:rPr>
+              <a:t>billed as in-house.</a:t>
             </a:r>
             <a:endParaRPr lang="en-US" sz="1250" dirty="0"/>
           </a:p>
@@ -11574,7 +11994,7 @@
       </p:sp>
       <p:pic>
         <p:nvPicPr>
-          <p:cNvPr id="16" name="Image 0" descr="assets/eov-wordmark-black-sm.png">    </p:cNvPr>
+          <p:cNvPr id="19" name="Image 0" descr="assets/eov-wordmark-black-sm.png">    </p:cNvPr>
           <p:cNvPicPr>
             <a:picLocks noChangeAspect="1"/>
           </p:cNvPicPr>
@@ -11598,7 +12018,7 @@
       </p:pic>
       <p:sp>
         <p:nvSpPr>
-          <p:cNvPr id="17" name="Text 14"/>
+          <p:cNvPr id="20" name="Text 17"/>
           <p:cNvSpPr txBox="1"/>
           <p:nvPr/>
         </p:nvSpPr>
@@ -11856,8 +12276,8 @@
         </p:nvSpPr>
         <p:spPr>
           <a:xfrm>
-            <a:off x="5829300" y="2324405"/>
-            <a:ext cx="5333695" cy="533095"/>
+            <a:off x="5829300" y="2266798"/>
+            <a:ext cx="5333695" cy="628193"/>
           </a:xfrm>
           <a:prstGeom prst="rect">
             <a:avLst/>
@@ -11871,12 +12291,12 @@
           <a:p>
             <a:pPr indent="0" marL="0">
               <a:lnSpc>
-                <a:spcPts val="1580"/>
+                <a:spcPts val="1500"/>
               </a:lnSpc>
               <a:buNone/>
             </a:pPr>
             <a:r>
-              <a:rPr lang="en-US" sz="1150" dirty="0">
+              <a:rPr lang="en-US" sz="1100" dirty="0">
                 <a:solidFill>
                   <a:srgbClr val="5A6068"/>
                 </a:solidFill>
@@ -11884,9 +12304,9 @@
                 <a:ea typeface="Arial" pitchFamily="34" charset="-122"/>
                 <a:cs typeface="Arial" pitchFamily="34" charset="-120"/>
               </a:rPr>
-              <a:t>The objective, the audience and the measure are agreed and written down first.</a:t>
-            </a:r>
-            <a:endParaRPr lang="en-US" sz="1150" dirty="0"/>
+              <a:t>The objective, the audience and the measure are agreed and written down before budget is committed. Disagreement surfaces in week one, not at the review.</a:t>
+            </a:r>
+            <a:endParaRPr lang="en-US" sz="1100" dirty="0"/>
           </a:p>
         </p:txBody>
       </p:sp>
@@ -11998,8 +12418,8 @@
         </p:nvSpPr>
         <p:spPr>
           <a:xfrm>
-            <a:off x="5829300" y="3391510"/>
-            <a:ext cx="5333695" cy="533095"/>
+            <a:off x="5829300" y="3333902"/>
+            <a:ext cx="5333695" cy="628193"/>
           </a:xfrm>
           <a:prstGeom prst="rect">
             <a:avLst/>
@@ -12013,12 +12433,12 @@
           <a:p>
             <a:pPr indent="0" marL="0">
               <a:lnSpc>
-                <a:spcPts val="1580"/>
+                <a:spcPts val="1500"/>
               </a:lnSpc>
               <a:buNone/>
             </a:pPr>
             <a:r>
-              <a:rPr lang="en-US" sz="1150" dirty="0">
+              <a:rPr lang="en-US" sz="1100" dirty="0">
                 <a:solidFill>
                   <a:srgbClr val="5A6068"/>
                 </a:solidFill>
@@ -12026,9 +12446,9 @@
                 <a:ea typeface="Arial" pitchFamily="34" charset="-122"/>
                 <a:cs typeface="Arial" pitchFamily="34" charset="-120"/>
               </a:rPr>
-              <a:t>Tracking and reporting are built and tested before the first impression is bought.</a:t>
-            </a:r>
-            <a:endParaRPr lang="en-US" sz="1150" dirty="0"/>
+              <a:t>Tracking and reporting are built and tested before the first impression is bought, so the first report is a reading rather than a reconstruction.</a:t>
+            </a:r>
+            <a:endParaRPr lang="en-US" sz="1100" dirty="0"/>
           </a:p>
         </p:txBody>
       </p:sp>
@@ -12140,8 +12560,8 @@
         </p:nvSpPr>
         <p:spPr>
           <a:xfrm>
-            <a:off x="5829300" y="4458614"/>
-            <a:ext cx="5333695" cy="533095"/>
+            <a:off x="5829300" y="4401007"/>
+            <a:ext cx="5333695" cy="628193"/>
           </a:xfrm>
           <a:prstGeom prst="rect">
             <a:avLst/>
@@ -12155,12 +12575,12 @@
           <a:p>
             <a:pPr indent="0" marL="0">
               <a:lnSpc>
-                <a:spcPts val="1580"/>
+                <a:spcPts val="1500"/>
               </a:lnSpc>
               <a:buNone/>
             </a:pPr>
             <a:r>
-              <a:rPr lang="en-US" sz="1150" dirty="0">
+              <a:rPr lang="en-US" sz="1100" dirty="0">
                 <a:solidFill>
                   <a:srgbClr val="5A6068"/>
                 </a:solidFill>
@@ -12168,9 +12588,9 @@
                 <a:ea typeface="Arial" pitchFamily="34" charset="-122"/>
                 <a:cs typeface="Arial" pitchFamily="34" charset="-120"/>
               </a:rPr>
-              <a:t>Platforms, advertising accounts, analytics and CRM are created under the client's entity.</a:t>
-            </a:r>
-            <a:endParaRPr lang="en-US" sz="1150" dirty="0"/>
+              <a:t>Platforms, advertising accounts, analytics and CRM are created under the client's entity. When an agency leaves, the history stays.</a:t>
+            </a:r>
+            <a:endParaRPr lang="en-US" sz="1100" dirty="0"/>
           </a:p>
         </p:txBody>
       </p:sp>
@@ -12486,7 +12906,7 @@
                 <a:ea typeface="Arial" pitchFamily="34" charset="-122"/>
                 <a:cs typeface="Arial" pitchFamily="34" charset="-120"/>
               </a:rPr>
-              <a:t>A short paid stage. Objective, audience and the measure of success, agreed and written down.</a:t>
+              <a:t>A short paid stage that ends in a written definition rather than a proposal: objective, audience, and the measure of success.</a:t>
             </a:r>
             <a:endParaRPr lang="en-US" sz="1150" dirty="0"/>
           </a:p>
@@ -12770,7 +13190,7 @@
                 <a:ea typeface="Arial" pitchFamily="34" charset="-122"/>
                 <a:cs typeface="Arial" pitchFamily="34" charset="-120"/>
               </a:rPr>
-              <a:t>Delivery and reporting on a fixed cadence, with one senior contact throughout.</a:t>
+              <a:t>Delivery and reporting on a fixed cadence, with one senior contact who does not change.</a:t>
             </a:r>
             <a:endParaRPr lang="en-US" sz="1150" dirty="0"/>
           </a:p>
@@ -13007,7 +13427,7 @@
                 <a:ea typeface="Arial" pitchFamily="34" charset="-122"/>
                 <a:cs typeface="Arial" pitchFamily="34" charset="-120"/>
               </a:rPr>
-              <a:t>MOHAMED-YOUSIF.PNG / [PORTRAIT]</a:t>
+              <a:t>MOHAMED-YOUSIF.PNG</a:t>
             </a:r>
             <a:endParaRPr lang="en-US" sz="950" dirty="0"/>
           </a:p>
@@ -13046,7 +13466,7 @@
                 <a:ea typeface="Arial" pitchFamily="34" charset="-122"/>
                 <a:cs typeface="Arial" pitchFamily="34" charset="-120"/>
               </a:rPr>
-              <a:t>[NAME]</a:t>
+              <a:t>Mohamed Yousif</a:t>
             </a:r>
             <a:endParaRPr lang="en-US" sz="1400" dirty="0"/>
           </a:p>
@@ -13085,7 +13505,7 @@
                 <a:ea typeface="Arial" pitchFamily="34" charset="-122"/>
                 <a:cs typeface="Arial" pitchFamily="34" charset="-120"/>
               </a:rPr>
-              <a:t>[Role]</a:t>
+              <a:t>Chief Executive · founder</a:t>
             </a:r>
             <a:endParaRPr lang="en-US" sz="1150" dirty="0"/>
           </a:p>
@@ -13146,7 +13566,7 @@
                 <a:ea typeface="Arial" pitchFamily="34" charset="-122"/>
                 <a:cs typeface="Arial" pitchFamily="34" charset="-120"/>
               </a:rPr>
-              <a:t>MOHAMED-YOUSIF.PNG / [PORTRAIT]</a:t>
+              <a:t>[PORTRAIT]</a:t>
             </a:r>
             <a:endParaRPr lang="en-US" sz="950" dirty="0"/>
           </a:p>
@@ -13285,7 +13705,7 @@
                 <a:ea typeface="Arial" pitchFamily="34" charset="-122"/>
                 <a:cs typeface="Arial" pitchFamily="34" charset="-120"/>
               </a:rPr>
-              <a:t>MOHAMED-YOUSIF.PNG / [PORTRAIT]</a:t>
+              <a:t>[PORTRAIT]</a:t>
             </a:r>
             <a:endParaRPr lang="en-US" sz="950" dirty="0"/>
           </a:p>
@@ -13424,7 +13844,7 @@
                 <a:ea typeface="Arial" pitchFamily="34" charset="-122"/>
                 <a:cs typeface="Arial" pitchFamily="34" charset="-120"/>
               </a:rPr>
-              <a:t>MOHAMED-YOUSIF.PNG / [PORTRAIT]</a:t>
+              <a:t>[PORTRAIT]</a:t>
             </a:r>
             <a:endParaRPr lang="en-US" sz="950" dirty="0"/>
           </a:p>
@@ -13692,8 +14112,8 @@
         </p:nvSpPr>
         <p:spPr>
           <a:xfrm>
-            <a:off x="685800" y="1904695"/>
-            <a:ext cx="8572500" cy="476402"/>
+            <a:off x="685800" y="1885493"/>
+            <a:ext cx="8953805" cy="571500"/>
           </a:xfrm>
           <a:prstGeom prst="rect">
             <a:avLst/>
@@ -13720,7 +14140,7 @@
                 <a:ea typeface="Arial" pitchFamily="34" charset="-122"/>
                 <a:cs typeface="Arial" pitchFamily="34" charset="-120"/>
               </a:rPr>
-              <a:t>Capacity is the standing question asked of any agency this size. Named partners are disclosed on every engagement.</a:t>
+              <a:t>Capacity is the standing question asked of any agency this size. EOV answers it by naming the partners rather than absorbing them into a headcount figure.</a:t>
             </a:r>
             <a:endParaRPr lang="en-US" sz="1300" dirty="0"/>
           </a:p>
@@ -14140,7 +14560,7 @@
                 <a:ea typeface="Arial" pitchFamily="34" charset="-122"/>
                 <a:cs typeface="Arial" pitchFamily="34" charset="-120"/>
               </a:rPr>
-              <a:t>[NAME], [TITLE]</a:t>
+              <a:t>EOV Technology Innovation</a:t>
             </a:r>
             <a:endParaRPr lang="en-US" sz="1400" dirty="0"/>
           </a:p>
@@ -14179,7 +14599,7 @@
                 <a:ea typeface="Arial" pitchFamily="34" charset="-122"/>
                 <a:cs typeface="Arial" pitchFamily="34" charset="-120"/>
               </a:rPr>
-              <a:t>[EMAIL]  ·  [PHONE]</a:t>
+              <a:t>tanvi@eov.ae  ·  [direct line]</a:t>
             </a:r>
             <a:endParaRPr lang="en-US" sz="1150" dirty="0"/>
           </a:p>
@@ -15057,7 +15477,7 @@
         <p:spPr>
           <a:xfrm>
             <a:off x="685800" y="800100"/>
-            <a:ext cx="10820095" cy="666598"/>
+            <a:ext cx="10820095" cy="590702"/>
           </a:xfrm>
           <a:prstGeom prst="rect">
             <a:avLst/>
@@ -15092,7 +15512,49 @@
       </p:sp>
       <p:sp>
         <p:nvSpPr>
-          <p:cNvPr id="4" name="Shape 2"/>
+          <p:cNvPr id="4" name="Text 2"/>
+          <p:cNvSpPr txBox="1"/>
+          <p:nvPr/>
+        </p:nvSpPr>
+        <p:spPr>
+          <a:xfrm>
+            <a:off x="685800" y="1485900"/>
+            <a:ext cx="10820095" cy="437998"/>
+          </a:xfrm>
+          <a:prstGeom prst="rect">
+            <a:avLst/>
+          </a:prstGeom>
+          <a:noFill/>
+          <a:ln/>
+        </p:spPr>
+        <p:txBody>
+          <a:bodyPr wrap="square" lIns="0" tIns="0" rIns="0" bIns="0" rtlCol="0" anchor="t"/>
+          <a:lstStyle/>
+          <a:p>
+            <a:pPr indent="0" marL="0">
+              <a:lnSpc>
+                <a:spcPts val="1950"/>
+              </a:lnSpc>
+              <a:buNone/>
+            </a:pPr>
+            <a:r>
+              <a:rPr lang="en-US" sz="1300" dirty="0">
+                <a:solidFill>
+                  <a:srgbClr val="5A6068"/>
+                </a:solidFill>
+                <a:latin typeface="Arial" pitchFamily="34" charset="0"/>
+                <a:ea typeface="Arial" pitchFamily="34" charset="-122"/>
+                <a:cs typeface="Arial" pitchFamily="34" charset="-120"/>
+              </a:rPr>
+              <a:t>Government and semi-government work is won on published criteria and delivered under audit — the least forgiving way to build a client list, and the most durable.</a:t>
+            </a:r>
+            <a:endParaRPr lang="en-US" sz="1300" dirty="0"/>
+          </a:p>
+        </p:txBody>
+      </p:sp>
+      <p:sp>
+        <p:nvSpPr>
+          <p:cNvPr id="5" name="Shape 3"/>
           <p:cNvSpPr/>
           <p:nvPr/>
         </p:nvSpPr>
@@ -15114,7 +15576,7 @@
       </p:sp>
       <p:sp>
         <p:nvSpPr>
-          <p:cNvPr id="5" name="Text 3"/>
+          <p:cNvPr id="6" name="Text 4"/>
           <p:cNvSpPr txBox="1"/>
           <p:nvPr/>
         </p:nvSpPr>
@@ -15153,7 +15615,7 @@
       </p:sp>
       <p:sp>
         <p:nvSpPr>
-          <p:cNvPr id="6" name="Shape 4"/>
+          <p:cNvPr id="7" name="Shape 5"/>
           <p:cNvSpPr/>
           <p:nvPr/>
         </p:nvSpPr>
@@ -15175,7 +15637,7 @@
       </p:sp>
       <p:sp>
         <p:nvSpPr>
-          <p:cNvPr id="7" name="Text 5"/>
+          <p:cNvPr id="8" name="Text 6"/>
           <p:cNvSpPr txBox="1"/>
           <p:nvPr/>
         </p:nvSpPr>
@@ -15214,7 +15676,7 @@
       </p:sp>
       <p:sp>
         <p:nvSpPr>
-          <p:cNvPr id="8" name="Shape 6"/>
+          <p:cNvPr id="9" name="Shape 7"/>
           <p:cNvSpPr/>
           <p:nvPr/>
         </p:nvSpPr>
@@ -15236,7 +15698,7 @@
       </p:sp>
       <p:sp>
         <p:nvSpPr>
-          <p:cNvPr id="9" name="Text 7"/>
+          <p:cNvPr id="10" name="Text 8"/>
           <p:cNvSpPr txBox="1"/>
           <p:nvPr/>
         </p:nvSpPr>
@@ -15275,7 +15737,7 @@
       </p:sp>
       <p:sp>
         <p:nvSpPr>
-          <p:cNvPr id="10" name="Shape 8"/>
+          <p:cNvPr id="11" name="Shape 9"/>
           <p:cNvSpPr/>
           <p:nvPr/>
         </p:nvSpPr>
@@ -15297,7 +15759,7 @@
       </p:sp>
       <p:sp>
         <p:nvSpPr>
-          <p:cNvPr id="11" name="Text 9"/>
+          <p:cNvPr id="12" name="Text 10"/>
           <p:cNvSpPr txBox="1"/>
           <p:nvPr/>
         </p:nvSpPr>
@@ -15336,7 +15798,7 @@
       </p:sp>
       <p:sp>
         <p:nvSpPr>
-          <p:cNvPr id="12" name="Shape 10"/>
+          <p:cNvPr id="13" name="Shape 11"/>
           <p:cNvSpPr/>
           <p:nvPr/>
         </p:nvSpPr>
@@ -15358,7 +15820,7 @@
       </p:sp>
       <p:sp>
         <p:nvSpPr>
-          <p:cNvPr id="13" name="Text 11"/>
+          <p:cNvPr id="14" name="Text 12"/>
           <p:cNvSpPr txBox="1"/>
           <p:nvPr/>
         </p:nvSpPr>
@@ -15397,7 +15859,7 @@
       </p:sp>
       <p:sp>
         <p:nvSpPr>
-          <p:cNvPr id="14" name="Shape 12"/>
+          <p:cNvPr id="15" name="Shape 13"/>
           <p:cNvSpPr/>
           <p:nvPr/>
         </p:nvSpPr>
@@ -15419,7 +15881,7 @@
       </p:sp>
       <p:sp>
         <p:nvSpPr>
-          <p:cNvPr id="15" name="Text 13"/>
+          <p:cNvPr id="16" name="Text 14"/>
           <p:cNvSpPr txBox="1"/>
           <p:nvPr/>
         </p:nvSpPr>
@@ -15458,7 +15920,7 @@
       </p:sp>
       <p:sp>
         <p:nvSpPr>
-          <p:cNvPr id="16" name="Shape 14"/>
+          <p:cNvPr id="17" name="Shape 15"/>
           <p:cNvSpPr/>
           <p:nvPr/>
         </p:nvSpPr>
@@ -15480,7 +15942,7 @@
       </p:sp>
       <p:sp>
         <p:nvSpPr>
-          <p:cNvPr id="17" name="Text 15"/>
+          <p:cNvPr id="18" name="Text 16"/>
           <p:cNvSpPr txBox="1"/>
           <p:nvPr/>
         </p:nvSpPr>
@@ -15519,7 +15981,7 @@
       </p:sp>
       <p:sp>
         <p:nvSpPr>
-          <p:cNvPr id="18" name="Shape 16"/>
+          <p:cNvPr id="19" name="Shape 17"/>
           <p:cNvSpPr/>
           <p:nvPr/>
         </p:nvSpPr>
@@ -15541,7 +16003,7 @@
       </p:sp>
       <p:sp>
         <p:nvSpPr>
-          <p:cNvPr id="19" name="Text 17"/>
+          <p:cNvPr id="20" name="Text 18"/>
           <p:cNvSpPr txBox="1"/>
           <p:nvPr/>
         </p:nvSpPr>
@@ -15580,7 +16042,7 @@
       </p:sp>
       <p:sp>
         <p:nvSpPr>
-          <p:cNvPr id="20" name="Shape 18"/>
+          <p:cNvPr id="21" name="Shape 19"/>
           <p:cNvSpPr/>
           <p:nvPr/>
         </p:nvSpPr>
@@ -15602,7 +16064,7 @@
       </p:sp>
       <p:sp>
         <p:nvSpPr>
-          <p:cNvPr id="21" name="Text 19"/>
+          <p:cNvPr id="22" name="Text 20"/>
           <p:cNvSpPr txBox="1"/>
           <p:nvPr/>
         </p:nvSpPr>
@@ -15641,7 +16103,7 @@
       </p:sp>
       <p:sp>
         <p:nvSpPr>
-          <p:cNvPr id="22" name="Shape 20"/>
+          <p:cNvPr id="23" name="Shape 21"/>
           <p:cNvSpPr/>
           <p:nvPr/>
         </p:nvSpPr>
@@ -15663,7 +16125,7 @@
       </p:sp>
       <p:sp>
         <p:nvSpPr>
-          <p:cNvPr id="23" name="Text 21"/>
+          <p:cNvPr id="24" name="Text 22"/>
           <p:cNvSpPr txBox="1"/>
           <p:nvPr/>
         </p:nvSpPr>
@@ -15702,7 +16164,7 @@
       </p:sp>
       <p:sp>
         <p:nvSpPr>
-          <p:cNvPr id="24" name="Shape 22"/>
+          <p:cNvPr id="25" name="Shape 23"/>
           <p:cNvSpPr/>
           <p:nvPr/>
         </p:nvSpPr>
@@ -15724,7 +16186,7 @@
       </p:sp>
       <p:sp>
         <p:nvSpPr>
-          <p:cNvPr id="25" name="Text 23"/>
+          <p:cNvPr id="26" name="Text 24"/>
           <p:cNvSpPr txBox="1"/>
           <p:nvPr/>
         </p:nvSpPr>
@@ -15763,7 +16225,7 @@
       </p:sp>
       <p:sp>
         <p:nvSpPr>
-          <p:cNvPr id="26" name="Shape 24"/>
+          <p:cNvPr id="27" name="Shape 25"/>
           <p:cNvSpPr/>
           <p:nvPr/>
         </p:nvSpPr>
@@ -15785,7 +16247,7 @@
       </p:sp>
       <p:sp>
         <p:nvSpPr>
-          <p:cNvPr id="27" name="Text 25"/>
+          <p:cNvPr id="28" name="Text 26"/>
           <p:cNvSpPr txBox="1"/>
           <p:nvPr/>
         </p:nvSpPr>
@@ -15824,7 +16286,7 @@
       </p:sp>
       <p:sp>
         <p:nvSpPr>
-          <p:cNvPr id="28" name="Text 26"/>
+          <p:cNvPr id="29" name="Text 27"/>
           <p:cNvSpPr txBox="1"/>
           <p:nvPr/>
         </p:nvSpPr>
@@ -15863,7 +16325,7 @@
       </p:sp>
       <p:pic>
         <p:nvPicPr>
-          <p:cNvPr id="29" name="Image 0" descr="assets/eov-wordmark-black-sm.png">    </p:cNvPr>
+          <p:cNvPr id="30" name="Image 0" descr="assets/eov-wordmark-black-sm.png">    </p:cNvPr>
           <p:cNvPicPr>
             <a:picLocks noChangeAspect="1"/>
           </p:cNvPicPr>
@@ -15887,7 +16349,7 @@
       </p:pic>
       <p:sp>
         <p:nvSpPr>
-          <p:cNvPr id="30" name="Text 27"/>
+          <p:cNvPr id="31" name="Text 28"/>
           <p:cNvSpPr txBox="1"/>
           <p:nvPr/>
         </p:nvSpPr>
@@ -16587,7 +17049,7 @@
         </p:nvSpPr>
         <p:spPr>
           <a:xfrm>
-            <a:off x="6228893" y="3238805"/>
+            <a:off x="6228893" y="2171700"/>
             <a:ext cx="5676870" cy="381305"/>
           </a:xfrm>
           <a:prstGeom prst="rect">
@@ -16620,42 +17082,23 @@
       </p:sp>
       <p:sp>
         <p:nvSpPr>
-          <p:cNvPr id="4" name="Text 2"/>
-          <p:cNvSpPr txBox="1"/>
-          <p:nvPr/>
-        </p:nvSpPr>
-        <p:spPr>
-          <a:xfrm>
-            <a:off x="685800" y="504749"/>
-            <a:ext cx="10820095" cy="190195"/>
-          </a:xfrm>
-          <a:prstGeom prst="rect">
-            <a:avLst/>
-          </a:prstGeom>
-          <a:noFill/>
-          <a:ln/>
-        </p:spPr>
-        <p:txBody>
-          <a:bodyPr wrap="square" lIns="0" tIns="0" rIns="0" bIns="0" rtlCol="0" anchor="ctr"/>
-          <a:lstStyle/>
-          <a:p>
-            <a:pPr indent="0" marL="0">
-              <a:buNone/>
-            </a:pPr>
-            <a:r>
-              <a:rPr lang="en-US" sz="950" b="1" spc="300" kern="0" dirty="0">
-                <a:solidFill>
-                  <a:srgbClr val="8A8F98"/>
-                </a:solidFill>
-                <a:latin typeface="Arial" pitchFamily="34" charset="0"/>
-                <a:ea typeface="Arial" pitchFamily="34" charset="-122"/>
-                <a:cs typeface="Arial" pitchFamily="34" charset="-120"/>
-              </a:rPr>
-              <a:t>FORREY &amp; GALLAND · LUXURY CONFECTIONERY</a:t>
-            </a:r>
-            <a:endParaRPr lang="en-US" sz="950" dirty="0"/>
-          </a:p>
-        </p:txBody>
+          <p:cNvPr id="4" name="Shape 2"/>
+          <p:cNvSpPr/>
+          <p:nvPr/>
+        </p:nvSpPr>
+        <p:spPr>
+          <a:xfrm>
+            <a:off x="5943600" y="4742993"/>
+            <a:ext cx="6248370" cy="2115007"/>
+          </a:xfrm>
+          <a:prstGeom prst="rect">
+            <a:avLst/>
+          </a:prstGeom>
+          <a:solidFill>
+            <a:srgbClr val="000000"/>
+          </a:solidFill>
+          <a:ln/>
+        </p:spPr>
       </p:sp>
       <p:sp>
         <p:nvSpPr>
@@ -16665,8 +17108,8 @@
         </p:nvSpPr>
         <p:spPr>
           <a:xfrm>
-            <a:off x="685800" y="800100"/>
-            <a:ext cx="4762195" cy="1809598"/>
+            <a:off x="6324905" y="5067605"/>
+            <a:ext cx="5486674" cy="724205"/>
           </a:xfrm>
           <a:prstGeom prst="rect">
             <a:avLst/>
@@ -16679,23 +17122,20 @@
           <a:lstStyle/>
           <a:p>
             <a:pPr indent="0" marL="0">
-              <a:lnSpc>
-                <a:spcPts val="3080"/>
-              </a:lnSpc>
-              <a:buNone/>
-            </a:pPr>
-            <a:r>
-              <a:rPr lang="en-US" sz="2550" b="1" dirty="0">
-                <a:solidFill>
-                  <a:srgbClr val="111111"/>
-                </a:solidFill>
-                <a:latin typeface="Arial" pitchFamily="34" charset="0"/>
-                <a:ea typeface="Arial" pitchFamily="34" charset="-122"/>
-                <a:cs typeface="Arial" pitchFamily="34" charset="-120"/>
-              </a:rPr>
-              <a:t>Search visibility up 3.4×, with no paid media.</a:t>
-            </a:r>
-            <a:endParaRPr lang="en-US" sz="2550" dirty="0"/>
+              <a:buNone/>
+            </a:pPr>
+            <a:r>
+              <a:rPr lang="en-US" sz="3750" b="1" dirty="0">
+                <a:solidFill>
+                  <a:srgbClr val="FFFFFF"/>
+                </a:solidFill>
+                <a:latin typeface="Arial" pitchFamily="34" charset="0"/>
+                <a:ea typeface="Arial" pitchFamily="34" charset="-122"/>
+                <a:cs typeface="Arial" pitchFamily="34" charset="-120"/>
+              </a:rPr>
+              <a:t>3.4×</a:t>
+            </a:r>
+            <a:endParaRPr lang="en-US" sz="3750" dirty="0"/>
           </a:p>
         </p:txBody>
       </p:sp>
@@ -16707,89 +17147,8 @@
         </p:nvSpPr>
         <p:spPr>
           <a:xfrm>
-            <a:off x="685800" y="2381098"/>
-            <a:ext cx="4762195" cy="1047902"/>
-          </a:xfrm>
-          <a:prstGeom prst="rect">
-            <a:avLst/>
-          </a:prstGeom>
-          <a:noFill/>
-          <a:ln/>
-        </p:spPr>
-        <p:txBody>
-          <a:bodyPr wrap="square" lIns="0" tIns="0" rIns="0" bIns="0" rtlCol="0" anchor="t"/>
-          <a:lstStyle/>
-          <a:p>
-            <a:pPr indent="0" marL="0">
-              <a:lnSpc>
-                <a:spcPts val="1950"/>
-              </a:lnSpc>
-              <a:buNone/>
-            </a:pPr>
-            <a:r>
-              <a:rPr lang="en-US" sz="1300" dirty="0">
-                <a:solidFill>
-                  <a:srgbClr val="5A6068"/>
-                </a:solidFill>
-                <a:latin typeface="Arial" pitchFamily="34" charset="0"/>
-                <a:ea typeface="Arial" pitchFamily="34" charset="-122"/>
-                <a:cs typeface="Arial" pitchFamily="34" charset="-120"/>
-              </a:rPr>
-              <a:t>Visibility built structurally rather than bought. Growth achieved with no paid search at any point across the period.</a:t>
-            </a:r>
-            <a:endParaRPr lang="en-US" sz="1300" dirty="0"/>
-          </a:p>
-        </p:txBody>
-      </p:sp>
-      <p:sp>
-        <p:nvSpPr>
-          <p:cNvPr id="7" name="Text 5"/>
-          <p:cNvSpPr txBox="1"/>
-          <p:nvPr/>
-        </p:nvSpPr>
-        <p:spPr>
-          <a:xfrm>
-            <a:off x="685800" y="4000500"/>
-            <a:ext cx="1447495" cy="437998"/>
-          </a:xfrm>
-          <a:prstGeom prst="rect">
-            <a:avLst/>
-          </a:prstGeom>
-          <a:noFill/>
-          <a:ln/>
-        </p:spPr>
-        <p:txBody>
-          <a:bodyPr wrap="square" lIns="0" tIns="0" rIns="0" bIns="0" rtlCol="0" anchor="ctr"/>
-          <a:lstStyle/>
-          <a:p>
-            <a:pPr indent="0" marL="0">
-              <a:buNone/>
-            </a:pPr>
-            <a:r>
-              <a:rPr lang="en-US" sz="2850" b="1" dirty="0">
-                <a:solidFill>
-                  <a:srgbClr val="111111"/>
-                </a:solidFill>
-                <a:latin typeface="Arial" pitchFamily="34" charset="0"/>
-                <a:ea typeface="Arial" pitchFamily="34" charset="-122"/>
-                <a:cs typeface="Arial" pitchFamily="34" charset="-120"/>
-              </a:rPr>
-              <a:t>3.4×</a:t>
-            </a:r>
-            <a:endParaRPr lang="en-US" sz="2850" dirty="0"/>
-          </a:p>
-        </p:txBody>
-      </p:sp>
-      <p:sp>
-        <p:nvSpPr>
-          <p:cNvPr id="8" name="Text 6"/>
-          <p:cNvSpPr txBox="1"/>
-          <p:nvPr/>
-        </p:nvSpPr>
-        <p:spPr>
-          <a:xfrm>
-            <a:off x="685800" y="4476902"/>
-            <a:ext cx="1410005" cy="381305"/>
+            <a:off x="6324905" y="5848502"/>
+            <a:ext cx="5486674" cy="437998"/>
           </a:xfrm>
           <a:prstGeom prst="rect">
             <a:avLst/>
@@ -16808,7 +17167,46 @@
               <a:buNone/>
             </a:pPr>
             <a:r>
-              <a:rPr lang="en-US" sz="950" b="1" spc="220" kern="0" dirty="0">
+              <a:rPr lang="en-US" sz="850" b="1" spc="240" kern="0" dirty="0">
+                <a:solidFill>
+                  <a:srgbClr val="54D2FE"/>
+                </a:solidFill>
+                <a:latin typeface="Arial" pitchFamily="34" charset="0"/>
+                <a:ea typeface="Arial" pitchFamily="34" charset="-122"/>
+                <a:cs typeface="Arial" pitchFamily="34" charset="-120"/>
+              </a:rPr>
+              <a:t>SEARCH VISIBILITY · ZERO PAID MEDIA</a:t>
+            </a:r>
+            <a:endParaRPr lang="en-US" sz="850" dirty="0"/>
+          </a:p>
+        </p:txBody>
+      </p:sp>
+      <p:sp>
+        <p:nvSpPr>
+          <p:cNvPr id="7" name="Text 5"/>
+          <p:cNvSpPr txBox="1"/>
+          <p:nvPr/>
+        </p:nvSpPr>
+        <p:spPr>
+          <a:xfrm>
+            <a:off x="685800" y="504749"/>
+            <a:ext cx="10820095" cy="190195"/>
+          </a:xfrm>
+          <a:prstGeom prst="rect">
+            <a:avLst/>
+          </a:prstGeom>
+          <a:noFill/>
+          <a:ln/>
+        </p:spPr>
+        <p:txBody>
+          <a:bodyPr wrap="square" lIns="0" tIns="0" rIns="0" bIns="0" rtlCol="0" anchor="ctr"/>
+          <a:lstStyle/>
+          <a:p>
+            <a:pPr indent="0" marL="0">
+              <a:buNone/>
+            </a:pPr>
+            <a:r>
+              <a:rPr lang="en-US" sz="950" b="1" spc="300" kern="0" dirty="0">
                 <a:solidFill>
                   <a:srgbClr val="8A8F98"/>
                 </a:solidFill>
@@ -16816,7 +17214,7 @@
                 <a:ea typeface="Arial" pitchFamily="34" charset="-122"/>
                 <a:cs typeface="Arial" pitchFamily="34" charset="-120"/>
               </a:rPr>
-              <a:t>VISIBILITY</a:t>
+              <a:t>FORREY &amp; GALLAND · LUXURY CONFECTIONERY</a:t>
             </a:r>
             <a:endParaRPr lang="en-US" sz="950" dirty="0"/>
           </a:p>
@@ -16824,14 +17222,56 @@
       </p:sp>
       <p:sp>
         <p:nvSpPr>
+          <p:cNvPr id="8" name="Text 6"/>
+          <p:cNvSpPr txBox="1"/>
+          <p:nvPr/>
+        </p:nvSpPr>
+        <p:spPr>
+          <a:xfrm>
+            <a:off x="685800" y="800100"/>
+            <a:ext cx="4724705" cy="1181405"/>
+          </a:xfrm>
+          <a:prstGeom prst="rect">
+            <a:avLst/>
+          </a:prstGeom>
+          <a:noFill/>
+          <a:ln/>
+        </p:spPr>
+        <p:txBody>
+          <a:bodyPr wrap="square" lIns="0" tIns="0" rIns="0" bIns="0" rtlCol="0" anchor="t"/>
+          <a:lstStyle/>
+          <a:p>
+            <a:pPr indent="0" marL="0">
+              <a:lnSpc>
+                <a:spcPts val="2700"/>
+              </a:lnSpc>
+              <a:buNone/>
+            </a:pPr>
+            <a:r>
+              <a:rPr lang="en-US" sz="2250" b="1" dirty="0">
+                <a:solidFill>
+                  <a:srgbClr val="111111"/>
+                </a:solidFill>
+                <a:latin typeface="Arial" pitchFamily="34" charset="0"/>
+                <a:ea typeface="Arial" pitchFamily="34" charset="-122"/>
+                <a:cs typeface="Arial" pitchFamily="34" charset="-120"/>
+              </a:rPr>
+              <a:t>Owning the occasions the business sells into.</a:t>
+            </a:r>
+            <a:endParaRPr lang="en-US" sz="2250" dirty="0"/>
+          </a:p>
+        </p:txBody>
+      </p:sp>
+      <p:sp>
+        <p:nvSpPr>
           <p:cNvPr id="9" name="Text 7"/>
           <p:cNvSpPr txBox="1"/>
           <p:nvPr/>
         </p:nvSpPr>
         <p:spPr>
           <a:xfrm>
-            <a:off x="2286000" y="4000500"/>
-            <a:ext cx="1447495" cy="437998"/>
+            <a:off x="685800" y="2171700"/>
+            <a:ext cx="4724705" cy="170993"/>
           </a:xfrm>
           <a:prstGeom prst="rect">
             <a:avLst/>
@@ -16847,17 +17287,17 @@
               <a:buNone/>
             </a:pPr>
             <a:r>
-              <a:rPr lang="en-US" sz="2850" b="1" dirty="0">
-                <a:solidFill>
-                  <a:srgbClr val="111111"/>
-                </a:solidFill>
-                <a:latin typeface="Arial" pitchFamily="34" charset="0"/>
-                <a:ea typeface="Arial" pitchFamily="34" charset="-122"/>
-                <a:cs typeface="Arial" pitchFamily="34" charset="-120"/>
-              </a:rPr>
-              <a:t>Zero</a:t>
-            </a:r>
-            <a:endParaRPr lang="en-US" sz="2850" dirty="0"/>
+              <a:rPr lang="en-US" sz="830" b="1" spc="260" kern="0" dirty="0">
+                <a:solidFill>
+                  <a:srgbClr val="8A8F98"/>
+                </a:solidFill>
+                <a:latin typeface="Arial" pitchFamily="34" charset="0"/>
+                <a:ea typeface="Arial" pitchFamily="34" charset="-122"/>
+                <a:cs typeface="Arial" pitchFamily="34" charset="-120"/>
+              </a:rPr>
+              <a:t>THE SITUATION</a:t>
+            </a:r>
+            <a:endParaRPr lang="en-US" sz="830" dirty="0"/>
           </a:p>
         </p:txBody>
       </p:sp>
@@ -16869,8 +17309,212 @@
         </p:nvSpPr>
         <p:spPr>
           <a:xfrm>
-            <a:off x="2286000" y="4476902"/>
-            <a:ext cx="1410005" cy="381305"/>
+            <a:off x="685800" y="2400300"/>
+            <a:ext cx="4724705" cy="742493"/>
+          </a:xfrm>
+          <a:prstGeom prst="rect">
+            <a:avLst/>
+          </a:prstGeom>
+          <a:noFill/>
+          <a:ln/>
+        </p:spPr>
+        <p:txBody>
+          <a:bodyPr wrap="square" lIns="0" tIns="0" rIns="0" bIns="0" rtlCol="0" anchor="t"/>
+          <a:lstStyle/>
+          <a:p>
+            <a:pPr indent="0" marL="0">
+              <a:lnSpc>
+                <a:spcPts val="1580"/>
+              </a:lnSpc>
+              <a:buNone/>
+            </a:pPr>
+            <a:r>
+              <a:rPr lang="en-US" sz="1150" dirty="0">
+                <a:solidFill>
+                  <a:srgbClr val="5A6068"/>
+                </a:solidFill>
+                <a:latin typeface="Arial" pitchFamily="34" charset="0"/>
+                <a:ea typeface="Arial" pitchFamily="34" charset="-122"/>
+                <a:cs typeface="Arial" pitchFamily="34" charset="-120"/>
+              </a:rPr>
+              <a:t>A hundred-year-old Parisian house trading in a market that knew the mall but not the name. Its four selling seasons move with the lunar calendar, so nothing carries over.</a:t>
+            </a:r>
+            <a:endParaRPr lang="en-US" sz="1150" dirty="0"/>
+          </a:p>
+        </p:txBody>
+      </p:sp>
+      <p:sp>
+        <p:nvSpPr>
+          <p:cNvPr id="11" name="Text 9"/>
+          <p:cNvSpPr txBox="1"/>
+          <p:nvPr/>
+        </p:nvSpPr>
+        <p:spPr>
+          <a:xfrm>
+            <a:off x="685800" y="3295498"/>
+            <a:ext cx="4724705" cy="170993"/>
+          </a:xfrm>
+          <a:prstGeom prst="rect">
+            <a:avLst/>
+          </a:prstGeom>
+          <a:noFill/>
+          <a:ln/>
+        </p:spPr>
+        <p:txBody>
+          <a:bodyPr wrap="square" lIns="0" tIns="0" rIns="0" bIns="0" rtlCol="0" anchor="ctr"/>
+          <a:lstStyle/>
+          <a:p>
+            <a:pPr indent="0" marL="0">
+              <a:buNone/>
+            </a:pPr>
+            <a:r>
+              <a:rPr lang="en-US" sz="830" b="1" spc="260" kern="0" dirty="0">
+                <a:solidFill>
+                  <a:srgbClr val="8A8F98"/>
+                </a:solidFill>
+                <a:latin typeface="Arial" pitchFamily="34" charset="0"/>
+                <a:ea typeface="Arial" pitchFamily="34" charset="-122"/>
+                <a:cs typeface="Arial" pitchFamily="34" charset="-120"/>
+              </a:rPr>
+              <a:t>WHAT EOV DID</a:t>
+            </a:r>
+            <a:endParaRPr lang="en-US" sz="830" dirty="0"/>
+          </a:p>
+        </p:txBody>
+      </p:sp>
+      <p:sp>
+        <p:nvSpPr>
+          <p:cNvPr id="12" name="Text 10"/>
+          <p:cNvSpPr txBox="1"/>
+          <p:nvPr/>
+        </p:nvSpPr>
+        <p:spPr>
+          <a:xfrm>
+            <a:off x="685800" y="3524098"/>
+            <a:ext cx="4724705" cy="1162202"/>
+          </a:xfrm>
+          <a:prstGeom prst="rect">
+            <a:avLst/>
+          </a:prstGeom>
+          <a:noFill/>
+          <a:ln/>
+        </p:spPr>
+        <p:txBody>
+          <a:bodyPr wrap="square" lIns="0" tIns="0" rIns="0" bIns="0" rtlCol="0" anchor="t"/>
+          <a:lstStyle/>
+          <a:p>
+            <a:pPr indent="0" marL="0">
+              <a:lnSpc>
+                <a:spcPts val="1580"/>
+              </a:lnSpc>
+              <a:buNone/>
+            </a:pPr>
+            <a:r>
+              <a:rPr lang="en-US" sz="1150" dirty="0">
+                <a:solidFill>
+                  <a:srgbClr val="5A6068"/>
+                </a:solidFill>
+                <a:latin typeface="Arial" pitchFamily="34" charset="0"/>
+                <a:ea typeface="Arial" pitchFamily="34" charset="-122"/>
+                <a:cs typeface="Arial" pitchFamily="34" charset="-120"/>
+              </a:rPr>
+              <a:t>EOV built each occasion as a permanent asset rather than a campaign that expires — product, photography, film, retail and search produced as one programme, so the same work carried the boutique, the feed and the search result. No paid search at any point.</a:t>
+            </a:r>
+            <a:endParaRPr lang="en-US" sz="1150" dirty="0"/>
+          </a:p>
+        </p:txBody>
+      </p:sp>
+      <p:sp>
+        <p:nvSpPr>
+          <p:cNvPr id="13" name="Text 11"/>
+          <p:cNvSpPr txBox="1"/>
+          <p:nvPr/>
+        </p:nvSpPr>
+        <p:spPr>
+          <a:xfrm>
+            <a:off x="685800" y="4762195"/>
+            <a:ext cx="4724705" cy="170993"/>
+          </a:xfrm>
+          <a:prstGeom prst="rect">
+            <a:avLst/>
+          </a:prstGeom>
+          <a:noFill/>
+          <a:ln/>
+        </p:spPr>
+        <p:txBody>
+          <a:bodyPr wrap="square" lIns="0" tIns="0" rIns="0" bIns="0" rtlCol="0" anchor="ctr"/>
+          <a:lstStyle/>
+          <a:p>
+            <a:pPr indent="0" marL="0">
+              <a:buNone/>
+            </a:pPr>
+            <a:r>
+              <a:rPr lang="en-US" sz="830" b="1" spc="260" kern="0" dirty="0">
+                <a:solidFill>
+                  <a:srgbClr val="8A8F98"/>
+                </a:solidFill>
+                <a:latin typeface="Arial" pitchFamily="34" charset="0"/>
+                <a:ea typeface="Arial" pitchFamily="34" charset="-122"/>
+                <a:cs typeface="Arial" pitchFamily="34" charset="-120"/>
+              </a:rPr>
+              <a:t>WHAT CHANGED</a:t>
+            </a:r>
+            <a:endParaRPr lang="en-US" sz="830" dirty="0"/>
+          </a:p>
+        </p:txBody>
+      </p:sp>
+      <p:sp>
+        <p:nvSpPr>
+          <p:cNvPr id="14" name="Text 12"/>
+          <p:cNvSpPr txBox="1"/>
+          <p:nvPr/>
+        </p:nvSpPr>
+        <p:spPr>
+          <a:xfrm>
+            <a:off x="685800" y="4990795"/>
+            <a:ext cx="4724705" cy="742493"/>
+          </a:xfrm>
+          <a:prstGeom prst="rect">
+            <a:avLst/>
+          </a:prstGeom>
+          <a:noFill/>
+          <a:ln/>
+        </p:spPr>
+        <p:txBody>
+          <a:bodyPr wrap="square" lIns="0" tIns="0" rIns="0" bIns="0" rtlCol="0" anchor="t"/>
+          <a:lstStyle/>
+          <a:p>
+            <a:pPr indent="0" marL="0">
+              <a:lnSpc>
+                <a:spcPts val="1580"/>
+              </a:lnSpc>
+              <a:buNone/>
+            </a:pPr>
+            <a:r>
+              <a:rPr lang="en-US" sz="1150" dirty="0">
+                <a:solidFill>
+                  <a:srgbClr val="5A6068"/>
+                </a:solidFill>
+                <a:latin typeface="Arial" pitchFamily="34" charset="0"/>
+                <a:ea typeface="Arial" pitchFamily="34" charset="-122"/>
+                <a:cs typeface="Arial" pitchFamily="34" charset="-120"/>
+              </a:rPr>
+              <a:t>Search visibility up 3.4× and a peak of 1,510 visits, in a category where competitors buy their way to the top of the page.</a:t>
+            </a:r>
+            <a:endParaRPr lang="en-US" sz="1150" dirty="0"/>
+          </a:p>
+        </p:txBody>
+      </p:sp>
+      <p:sp>
+        <p:nvSpPr>
+          <p:cNvPr id="15" name="Text 13"/>
+          <p:cNvSpPr txBox="1"/>
+          <p:nvPr/>
+        </p:nvSpPr>
+        <p:spPr>
+          <a:xfrm>
+            <a:off x="685800" y="5771693"/>
+            <a:ext cx="4724705" cy="342900"/>
           </a:xfrm>
           <a:prstGeom prst="rect">
             <a:avLst/>
@@ -16889,7 +17533,7 @@
               <a:buNone/>
             </a:pPr>
             <a:r>
-              <a:rPr lang="en-US" sz="950" b="1" spc="220" kern="0" dirty="0">
+              <a:rPr lang="en-US" sz="830" b="1" spc="160" kern="0" dirty="0">
                 <a:solidFill>
                   <a:srgbClr val="8A8F98"/>
                 </a:solidFill>
@@ -16897,96 +17541,15 @@
                 <a:ea typeface="Arial" pitchFamily="34" charset="-122"/>
                 <a:cs typeface="Arial" pitchFamily="34" charset="-120"/>
               </a:rPr>
-              <a:t>PAID SEARCH</a:t>
-            </a:r>
-            <a:endParaRPr lang="en-US" sz="950" dirty="0"/>
-          </a:p>
-        </p:txBody>
-      </p:sp>
-      <p:sp>
-        <p:nvSpPr>
-          <p:cNvPr id="11" name="Text 9"/>
-          <p:cNvSpPr txBox="1"/>
-          <p:nvPr/>
-        </p:nvSpPr>
-        <p:spPr>
-          <a:xfrm>
-            <a:off x="3886200" y="4000500"/>
-            <a:ext cx="1447495" cy="437998"/>
-          </a:xfrm>
-          <a:prstGeom prst="rect">
-            <a:avLst/>
-          </a:prstGeom>
-          <a:noFill/>
-          <a:ln/>
-        </p:spPr>
-        <p:txBody>
-          <a:bodyPr wrap="square" lIns="0" tIns="0" rIns="0" bIns="0" rtlCol="0" anchor="ctr"/>
-          <a:lstStyle/>
-          <a:p>
-            <a:pPr indent="0" marL="0">
-              <a:buNone/>
-            </a:pPr>
-            <a:r>
-              <a:rPr lang="en-US" sz="2850" b="1" dirty="0">
-                <a:solidFill>
-                  <a:srgbClr val="111111"/>
-                </a:solidFill>
-                <a:latin typeface="Arial" pitchFamily="34" charset="0"/>
-                <a:ea typeface="Arial" pitchFamily="34" charset="-122"/>
-                <a:cs typeface="Arial" pitchFamily="34" charset="-120"/>
-              </a:rPr>
-              <a:t>1,510</a:t>
-            </a:r>
-            <a:endParaRPr lang="en-US" sz="2850" dirty="0"/>
-          </a:p>
-        </p:txBody>
-      </p:sp>
-      <p:sp>
-        <p:nvSpPr>
-          <p:cNvPr id="12" name="Text 10"/>
-          <p:cNvSpPr txBox="1"/>
-          <p:nvPr/>
-        </p:nvSpPr>
-        <p:spPr>
-          <a:xfrm>
-            <a:off x="3886200" y="4476902"/>
-            <a:ext cx="1410005" cy="381305"/>
-          </a:xfrm>
-          <a:prstGeom prst="rect">
-            <a:avLst/>
-          </a:prstGeom>
-          <a:noFill/>
-          <a:ln/>
-        </p:spPr>
-        <p:txBody>
-          <a:bodyPr wrap="square" lIns="0" tIns="0" rIns="0" bIns="0" rtlCol="0" anchor="t"/>
-          <a:lstStyle/>
-          <a:p>
-            <a:pPr indent="0" marL="0">
-              <a:lnSpc>
-                <a:spcPts val="1200"/>
-              </a:lnSpc>
-              <a:buNone/>
-            </a:pPr>
-            <a:r>
-              <a:rPr lang="en-US" sz="950" b="1" spc="220" kern="0" dirty="0">
-                <a:solidFill>
-                  <a:srgbClr val="8A8F98"/>
-                </a:solidFill>
-                <a:latin typeface="Arial" pitchFamily="34" charset="0"/>
-                <a:ea typeface="Arial" pitchFamily="34" charset="-122"/>
-                <a:cs typeface="Arial" pitchFamily="34" charset="-120"/>
-              </a:rPr>
-              <a:t>PEAK VISITS</a:t>
-            </a:r>
-            <a:endParaRPr lang="en-US" sz="950" dirty="0"/>
+              <a:t>Strategy · brand · photography · film · digital · retail · events</a:t>
+            </a:r>
+            <a:endParaRPr lang="en-US" sz="830" dirty="0"/>
           </a:p>
         </p:txBody>
       </p:sp>
       <p:pic>
         <p:nvPicPr>
-          <p:cNvPr id="13" name="Image 0" descr="assets/eov-wordmark-black-sm.png">    </p:cNvPr>
+          <p:cNvPr id="16" name="Image 0" descr="assets/eov-wordmark-black-sm.png">    </p:cNvPr>
           <p:cNvPicPr>
             <a:picLocks noChangeAspect="1"/>
           </p:cNvPicPr>
@@ -17010,7 +17573,7 @@
       </p:pic>
       <p:sp>
         <p:nvSpPr>
-          <p:cNvPr id="14" name="Text 11"/>
+          <p:cNvPr id="17" name="Text 14"/>
           <p:cNvSpPr txBox="1"/>
           <p:nvPr/>
         </p:nvSpPr>
